--- a/卒業発表_MsOmotenashiConcierge.pptx
+++ b/卒業発表_MsOmotenashiConcierge.pptx
@@ -692,7 +692,7 @@
           <a:lstStyle/>
           <a:p>
             <a:r>
-              <a:t>公開は、見る・探すだけ。直すのは自分用。最初は Google フォーム、いまは非公開の画面から入力します。アプリで直しても、シートに残る。</a:t>
+              <a:t>お題を選んだのは、実用的で、自分の記録にもなるし、これからもアップデートできるからです。相談されたその場で呼び出せる。行った店や贈りたい手土産を、備忘録として残せる。シートに足せば、公開側も育つ。卒業制作で止めない前提です。</a:t>
             </a:r>
           </a:p>
         </p:txBody>
@@ -762,17 +762,7 @@
           <a:lstStyle/>
           <a:p>
             <a:r>
-              <a:t>口コミの量ではなく、私自身の選択眼を残す、パーソナル・コンシェルジュです。</a:t>
-            </a:r>
-          </a:p>
-          <a:p>
-            <a:r>
-              <a:t>出版社の現場で培った目利き。「美味しいだけでなく、その場にちょうどいい」。「誰が、どんな基準で選ぶか」。それを置くのが、About M です。</a:t>
-            </a:r>
-          </a:p>
-          <a:p>
-            <a:r>
-              <a:t>デモでも、このページを開きます。</a:t>
+              <a:t>公開は、見る・探すだけ。直すのは自分用。最初は Google フォーム、いまは非公開の画面から入力します。アプリで直しても、シートに残る。</a:t>
             </a:r>
           </a:p>
         </p:txBody>
@@ -842,17 +832,17 @@
           <a:lstStyle/>
           <a:p>
             <a:r>
-              <a:t>Visit は実際に訪問、Wishlist は行ってみたい。Choice は特集で、ステータスではありません。</a:t>
-            </a:r>
-          </a:p>
-          <a:p>
-            <a:r>
-              <a:t>見た目も、AI で作りました。かわいい、女性向けに寄りすぎる案も出た。男性にも使ってほしいので、上質・知的・ニュートラルへ寄せた。</a:t>
-            </a:r>
-          </a:p>
-          <a:p>
-            <a:r>
-              <a:t>デザインに使ったのは Cursor。検索の AI API は、まだ繋いでいません。</a:t>
+              <a:t>口コミの量ではなく、私自身の選択眼を残す、パーソナル・コンシェルジュです。</a:t>
+            </a:r>
+          </a:p>
+          <a:p>
+            <a:r>
+              <a:t>出版社の現場で培った目利き。「美味しいだけでなく、その場にちょうどいい」。「誰が、どんな基準で選ぶか」。それを置くのが、About M です。</a:t>
+            </a:r>
+          </a:p>
+          <a:p>
+            <a:r>
+              <a:t>デモでも、このページを開きます。</a:t>
             </a:r>
           </a:p>
         </p:txBody>
@@ -927,12 +917,17 @@
           </a:p>
           <a:p>
             <a:r>
-              <a:t>いまの音声は、入力です。「恵比寿 和食」はできる。「恵比寿で和食が食べたい」の意味理解は、これから。</a:t>
-            </a:r>
-          </a:p>
-          <a:p>
-            <a:r>
-              <a:t>世の中の店を AI に聞くのではありません。私の登録データを、再利用する。そのために、先に構造化した。</a:t>
+              <a:t>Visit は実際に訪問、Wishlist は行ってみたい。Choice は特集で、ステータスではありません。</a:t>
+            </a:r>
+          </a:p>
+          <a:p>
+            <a:r>
+              <a:t>見た目も、AI で作りました。かわいい案から、上質・知的・ニュートラルへ。デザインは Cursor。検索の AI API は、まだ繋いでいません。</a:t>
+            </a:r>
+          </a:p>
+          <a:p>
+            <a:r>
+              <a:t>いまの音声は、入力です。「恵比寿 和食」はできる。「恵比寿で和食が食べたい」の意味理解は、これから。世の中の店を AI に聞くのではありません。私の登録データを、再利用する。</a:t>
             </a:r>
           </a:p>
         </p:txBody>
@@ -4232,7 +4227,7 @@
                 <a:latin typeface="Yu Gothic"/>
                 <a:ea typeface="Yu Gothic"/>
               </a:rPr>
-              <a:t>ADS 卒業制作</a:t>
+              <a:t>ADS 卒業制作｜開発ストーリー</a:t>
             </a:r>
           </a:p>
         </p:txBody>
@@ -4541,7 +4536,7 @@
                 <a:latin typeface="Yu Gothic"/>
                 <a:ea typeface="Yu Gothic"/>
               </a:rPr>
-              <a:t>なぜ作ったか</a:t>
+              <a:t>解決する面倒・課題</a:t>
             </a:r>
           </a:p>
         </p:txBody>
@@ -5347,7 +5342,7 @@
                 <a:latin typeface="Yu Gothic"/>
                 <a:ea typeface="Yu Gothic"/>
               </a:rPr>
-              <a:t>作ったもの</a:t>
+              <a:t>作りたいと思った理由</a:t>
             </a:r>
           </a:p>
         </p:txBody>
@@ -5387,7 +5382,7 @@
                 <a:latin typeface="Yu Mincho"/>
                 <a:ea typeface="Yu Mincho"/>
               </a:rPr>
-              <a:t>見る・探すは公開。直すのは自分用</a:t>
+              <a:t>実用的で、記録になり、育てられる</a:t>
             </a:r>
           </a:p>
         </p:txBody>
@@ -5400,7 +5395,7 @@
         </p:nvSpPr>
         <p:spPr>
           <a:xfrm>
-            <a:off x="4937760" y="960120"/>
+            <a:off x="4937760" y="1051560"/>
             <a:ext cx="2286000" cy="15240"/>
           </a:xfrm>
           <a:prstGeom prst="rect">
@@ -5443,7 +5438,7 @@
         </p:nvSpPr>
         <p:spPr>
           <a:xfrm>
-            <a:off x="5943600" y="909320"/>
+            <a:off x="5943600" y="1000760"/>
             <a:ext cx="127000" cy="127000"/>
           </a:xfrm>
           <a:prstGeom prst="diamond">
@@ -5482,17 +5477,19 @@
       </p:sp>
       <p:sp>
         <p:nvSpPr>
-          <p:cNvPr id="6" name="Rectangle 5"/>
+          <p:cNvPr id="6" name="Rounded Rectangle 5"/>
           <p:cNvSpPr/>
           <p:nvPr/>
         </p:nvSpPr>
         <p:spPr>
           <a:xfrm>
-            <a:off x="1862175" y="1078992"/>
-            <a:ext cx="4160520" cy="2852928"/>
-          </a:xfrm>
-          <a:prstGeom prst="rect">
-            <a:avLst/>
+            <a:off x="640080" y="1371600"/>
+            <a:ext cx="3520440" cy="3108960"/>
+          </a:xfrm>
+          <a:prstGeom prst="roundRect">
+            <a:avLst>
+              <a:gd name="adj" fmla="val 8000"/>
+            </a:avLst>
           </a:prstGeom>
           <a:solidFill>
             <a:srgbClr val="FFFFFF"/>
@@ -5525,40 +5522,16 @@
           </a:p>
         </p:txBody>
       </p:sp>
-      <p:pic>
-        <p:nvPicPr>
-          <p:cNvPr id="7" name="Picture 6" descr="_verify-home.png"/>
-          <p:cNvPicPr>
-            <a:picLocks noChangeAspect="1"/>
-          </p:cNvPicPr>
-          <p:nvPr/>
-        </p:nvPicPr>
-        <p:blipFill>
-          <a:blip r:embed="rId2"/>
-          <a:stretch>
-            <a:fillRect/>
-          </a:stretch>
-        </p:blipFill>
-        <p:spPr>
-          <a:xfrm>
-            <a:off x="1951075" y="1115568"/>
-            <a:ext cx="3982720" cy="2560320"/>
-          </a:xfrm>
-          <a:prstGeom prst="rect">
-            <a:avLst/>
-          </a:prstGeom>
-        </p:spPr>
-      </p:pic>
-      <p:sp>
-        <p:nvSpPr>
-          <p:cNvPr id="8" name="TextBox 7"/>
+      <p:sp>
+        <p:nvSpPr>
+          <p:cNvPr id="7" name="TextBox 6"/>
           <p:cNvSpPr txBox="1"/>
           <p:nvPr/>
         </p:nvSpPr>
         <p:spPr>
           <a:xfrm>
-            <a:off x="1935327" y="3675888"/>
-            <a:ext cx="4014216" cy="256032"/>
+            <a:off x="786384" y="1499616"/>
+            <a:ext cx="3227832" cy="329184"/>
           </a:xfrm>
           <a:prstGeom prst="rect">
             <a:avLst/>
@@ -5577,31 +5550,73 @@
               </a:spcAft>
             </a:pPr>
             <a:r>
-              <a:rPr sz="1000" b="0">
+              <a:rPr sz="1400" b="0">
+                <a:solidFill>
+                  <a:srgbClr val="243056"/>
+                </a:solidFill>
+                <a:latin typeface="Yu Mincho"/>
+                <a:ea typeface="Yu Mincho"/>
+              </a:rPr>
+              <a:t>実用的</a:t>
+            </a:r>
+          </a:p>
+        </p:txBody>
+      </p:sp>
+      <p:sp>
+        <p:nvSpPr>
+          <p:cNvPr id="8" name="TextBox 7"/>
+          <p:cNvSpPr txBox="1"/>
+          <p:nvPr/>
+        </p:nvSpPr>
+        <p:spPr>
+          <a:xfrm>
+            <a:off x="786384" y="1828800"/>
+            <a:ext cx="3227832" cy="2542032"/>
+          </a:xfrm>
+          <a:prstGeom prst="rect">
+            <a:avLst/>
+          </a:prstGeom>
+          <a:noFill/>
+        </p:spPr>
+        <p:txBody>
+          <a:bodyPr wrap="square">
+            <a:spAutoFit/>
+          </a:bodyPr>
+          <a:lstStyle/>
+          <a:p>
+            <a:pPr algn="l">
+              <a:spcAft>
+                <a:spcPts val="0"/>
+              </a:spcAft>
+            </a:pPr>
+            <a:r>
+              <a:rPr sz="1300" b="0">
                 <a:solidFill>
                   <a:srgbClr val="6B5E4E"/>
                 </a:solidFill>
                 <a:latin typeface="Yu Gothic"/>
                 <a:ea typeface="Yu Gothic"/>
               </a:rPr>
-              <a:t>公開｜トップ　Restaurant / Gift</a:t>
-            </a:r>
-          </a:p>
-        </p:txBody>
-      </p:sp>
-      <p:sp>
-        <p:nvSpPr>
-          <p:cNvPr id="9" name="Rectangle 8"/>
+              <a:t>相談されたその場で、条件から店や手土産を呼び出せる。</a:t>
+            </a:r>
+          </a:p>
+        </p:txBody>
+      </p:sp>
+      <p:sp>
+        <p:nvSpPr>
+          <p:cNvPr id="9" name="Rounded Rectangle 8"/>
           <p:cNvSpPr/>
           <p:nvPr/>
         </p:nvSpPr>
         <p:spPr>
           <a:xfrm>
-            <a:off x="6168999" y="1078992"/>
-            <a:ext cx="4160520" cy="2852928"/>
-          </a:xfrm>
-          <a:prstGeom prst="rect">
-            <a:avLst/>
+            <a:off x="4343400" y="1371600"/>
+            <a:ext cx="3520440" cy="3108960"/>
+          </a:xfrm>
+          <a:prstGeom prst="roundRect">
+            <a:avLst>
+              <a:gd name="adj" fmla="val 8000"/>
+            </a:avLst>
           </a:prstGeom>
           <a:solidFill>
             <a:srgbClr val="FFFFFF"/>
@@ -5634,40 +5649,16 @@
           </a:p>
         </p:txBody>
       </p:sp>
-      <p:pic>
-        <p:nvPicPr>
-          <p:cNvPr id="10" name="Picture 9" descr="_verify-restaurants.png"/>
-          <p:cNvPicPr>
-            <a:picLocks noChangeAspect="1"/>
-          </p:cNvPicPr>
-          <p:nvPr/>
-        </p:nvPicPr>
-        <p:blipFill>
-          <a:blip r:embed="rId3"/>
-          <a:stretch>
-            <a:fillRect/>
-          </a:stretch>
-        </p:blipFill>
-        <p:spPr>
-          <a:xfrm>
-            <a:off x="6257899" y="1115568"/>
-            <a:ext cx="3982720" cy="2560320"/>
-          </a:xfrm>
-          <a:prstGeom prst="rect">
-            <a:avLst/>
-          </a:prstGeom>
-        </p:spPr>
-      </p:pic>
-      <p:sp>
-        <p:nvSpPr>
-          <p:cNvPr id="11" name="TextBox 10"/>
+      <p:sp>
+        <p:nvSpPr>
+          <p:cNvPr id="10" name="TextBox 9"/>
           <p:cNvSpPr txBox="1"/>
           <p:nvPr/>
         </p:nvSpPr>
         <p:spPr>
           <a:xfrm>
-            <a:off x="6242151" y="3675888"/>
-            <a:ext cx="4014216" cy="256032"/>
+            <a:off x="4489704" y="1499616"/>
+            <a:ext cx="3227832" cy="329184"/>
           </a:xfrm>
           <a:prstGeom prst="rect">
             <a:avLst/>
@@ -5686,31 +5677,73 @@
               </a:spcAft>
             </a:pPr>
             <a:r>
-              <a:rPr sz="1000" b="0">
+              <a:rPr sz="1400" b="0">
+                <a:solidFill>
+                  <a:srgbClr val="243056"/>
+                </a:solidFill>
+                <a:latin typeface="Yu Mincho"/>
+                <a:ea typeface="Yu Mincho"/>
+              </a:rPr>
+              <a:t>自分の記録にもなる</a:t>
+            </a:r>
+          </a:p>
+        </p:txBody>
+      </p:sp>
+      <p:sp>
+        <p:nvSpPr>
+          <p:cNvPr id="11" name="TextBox 10"/>
+          <p:cNvSpPr txBox="1"/>
+          <p:nvPr/>
+        </p:nvSpPr>
+        <p:spPr>
+          <a:xfrm>
+            <a:off x="4489704" y="1828800"/>
+            <a:ext cx="3227832" cy="2542032"/>
+          </a:xfrm>
+          <a:prstGeom prst="rect">
+            <a:avLst/>
+          </a:prstGeom>
+          <a:noFill/>
+        </p:spPr>
+        <p:txBody>
+          <a:bodyPr wrap="square">
+            <a:spAutoFit/>
+          </a:bodyPr>
+          <a:lstStyle/>
+          <a:p>
+            <a:pPr algn="l">
+              <a:spcAft>
+                <a:spcPts val="0"/>
+              </a:spcAft>
+            </a:pPr>
+            <a:r>
+              <a:rPr sz="1300" b="0">
                 <a:solidFill>
                   <a:srgbClr val="6B5E4E"/>
                 </a:solidFill>
                 <a:latin typeface="Yu Gothic"/>
                 <a:ea typeface="Yu Gothic"/>
               </a:rPr>
-              <a:t>公開｜Restaurant　条件・単語・音声</a:t>
-            </a:r>
-          </a:p>
-        </p:txBody>
-      </p:sp>
-      <p:sp>
-        <p:nvSpPr>
-          <p:cNvPr id="12" name="Rectangle 11"/>
+              <a:t>行った店、贈りたい手土産を、自分用の備忘録として残せる。</a:t>
+            </a:r>
+          </a:p>
+        </p:txBody>
+      </p:sp>
+      <p:sp>
+        <p:nvSpPr>
+          <p:cNvPr id="12" name="Rounded Rectangle 11"/>
           <p:cNvSpPr/>
           <p:nvPr/>
         </p:nvSpPr>
         <p:spPr>
           <a:xfrm>
-            <a:off x="1862175" y="4023360"/>
-            <a:ext cx="4160520" cy="2852928"/>
-          </a:xfrm>
-          <a:prstGeom prst="rect">
-            <a:avLst/>
+            <a:off x="8046720" y="1371600"/>
+            <a:ext cx="3520440" cy="3108960"/>
+          </a:xfrm>
+          <a:prstGeom prst="roundRect">
+            <a:avLst>
+              <a:gd name="adj" fmla="val 8000"/>
+            </a:avLst>
           </a:prstGeom>
           <a:solidFill>
             <a:srgbClr val="FFFFFF"/>
@@ -5743,40 +5776,16 @@
           </a:p>
         </p:txBody>
       </p:sp>
-      <p:pic>
-        <p:nvPicPr>
-          <p:cNvPr id="13" name="Picture 12" descr="about-visit-wishlist.png"/>
-          <p:cNvPicPr>
-            <a:picLocks noChangeAspect="1"/>
-          </p:cNvPicPr>
-          <p:nvPr/>
-        </p:nvPicPr>
-        <p:blipFill>
-          <a:blip r:embed="rId4"/>
-          <a:stretch>
-            <a:fillRect/>
-          </a:stretch>
-        </p:blipFill>
-        <p:spPr>
-          <a:xfrm>
-            <a:off x="1898751" y="4233100"/>
-            <a:ext cx="4087368" cy="2213991"/>
-          </a:xfrm>
-          <a:prstGeom prst="rect">
-            <a:avLst/>
-          </a:prstGeom>
-        </p:spPr>
-      </p:pic>
-      <p:sp>
-        <p:nvSpPr>
-          <p:cNvPr id="14" name="TextBox 13"/>
+      <p:sp>
+        <p:nvSpPr>
+          <p:cNvPr id="13" name="TextBox 12"/>
           <p:cNvSpPr txBox="1"/>
           <p:nvPr/>
         </p:nvSpPr>
         <p:spPr>
           <a:xfrm>
-            <a:off x="1935327" y="6620256"/>
-            <a:ext cx="4014216" cy="256032"/>
+            <a:off x="8193024" y="1499616"/>
+            <a:ext cx="3227832" cy="329184"/>
           </a:xfrm>
           <a:prstGeom prst="rect">
             <a:avLst/>
@@ -5795,97 +5804,28 @@
               </a:spcAft>
             </a:pPr>
             <a:r>
-              <a:rPr sz="1000" b="0">
-                <a:solidFill>
-                  <a:srgbClr val="6B5E4E"/>
-                </a:solidFill>
-                <a:latin typeface="Yu Gothic"/>
-                <a:ea typeface="Yu Gothic"/>
+              <a:rPr sz="1400" b="0">
+                <a:solidFill>
+                  <a:srgbClr val="243056"/>
+                </a:solidFill>
+                <a:latin typeface="Yu Mincho"/>
+                <a:ea typeface="Yu Mincho"/>
               </a:rPr>
-              <a:t>公開｜Visit / Wishlist　店舗ステータス</a:t>
-            </a:r>
-          </a:p>
-        </p:txBody>
-      </p:sp>
-      <p:sp>
-        <p:nvSpPr>
-          <p:cNvPr id="15" name="Rectangle 14"/>
-          <p:cNvSpPr/>
-          <p:nvPr/>
-        </p:nvSpPr>
-        <p:spPr>
-          <a:xfrm>
-            <a:off x="6168999" y="4023360"/>
-            <a:ext cx="4160520" cy="2852928"/>
-          </a:xfrm>
-          <a:prstGeom prst="rect">
-            <a:avLst/>
-          </a:prstGeom>
-          <a:solidFill>
-            <a:srgbClr val="FFFFFF"/>
-          </a:solidFill>
-          <a:ln w="12700">
-            <a:solidFill>
-              <a:srgbClr val="D7CCBA"/>
-            </a:solidFill>
-          </a:ln>
-        </p:spPr>
-        <p:style>
-          <a:lnRef idx="1">
-            <a:schemeClr val="accent1"/>
-          </a:lnRef>
-          <a:fillRef idx="3">
-            <a:schemeClr val="accent1"/>
-          </a:fillRef>
-          <a:effectRef idx="2">
-            <a:schemeClr val="accent1"/>
-          </a:effectRef>
-          <a:fontRef idx="minor">
-            <a:schemeClr val="lt1"/>
-          </a:fontRef>
-        </p:style>
-        <p:txBody>
-          <a:bodyPr rtlCol="0" anchor="ctr"/>
-          <a:lstStyle/>
-          <a:p>
-            <a:pPr algn="ctr"/>
-          </a:p>
-        </p:txBody>
-      </p:sp>
-      <p:pic>
-        <p:nvPicPr>
-          <p:cNvPr id="16" name="Picture 15" descr="_verify-edit.png"/>
-          <p:cNvPicPr>
-            <a:picLocks noChangeAspect="1"/>
-          </p:cNvPicPr>
-          <p:nvPr/>
-        </p:nvPicPr>
-        <p:blipFill>
-          <a:blip r:embed="rId5"/>
-          <a:stretch>
-            <a:fillRect/>
-          </a:stretch>
-        </p:blipFill>
-        <p:spPr>
-          <a:xfrm>
-            <a:off x="6428587" y="4059936"/>
-            <a:ext cx="3641344" cy="2560320"/>
-          </a:xfrm>
-          <a:prstGeom prst="rect">
-            <a:avLst/>
-          </a:prstGeom>
-        </p:spPr>
-      </p:pic>
-      <p:sp>
-        <p:nvSpPr>
-          <p:cNvPr id="17" name="TextBox 16"/>
+              <a:t>これからもアップデートできる</a:t>
+            </a:r>
+          </a:p>
+        </p:txBody>
+      </p:sp>
+      <p:sp>
+        <p:nvSpPr>
+          <p:cNvPr id="14" name="TextBox 13"/>
           <p:cNvSpPr txBox="1"/>
           <p:nvPr/>
         </p:nvSpPr>
         <p:spPr>
           <a:xfrm>
-            <a:off x="6242151" y="6620256"/>
-            <a:ext cx="4014216" cy="256032"/>
+            <a:off x="8193024" y="1828800"/>
+            <a:ext cx="3227832" cy="2542032"/>
           </a:xfrm>
           <a:prstGeom prst="rect">
             <a:avLst/>
@@ -5904,14 +5844,71 @@
               </a:spcAft>
             </a:pPr>
             <a:r>
-              <a:rPr sz="1000" b="0">
+              <a:rPr sz="1300" b="0">
                 <a:solidFill>
                   <a:srgbClr val="6B5E4E"/>
                 </a:solidFill>
                 <a:latin typeface="Yu Gothic"/>
                 <a:ea typeface="Yu Gothic"/>
               </a:rPr>
-              <a:t>入力｜非公開 /edit　フォームから移した</a:t>
+              <a:t>シートに足せば公開側も育つ。卒業制作で止めない前提。</a:t>
+            </a:r>
+          </a:p>
+        </p:txBody>
+      </p:sp>
+      <p:sp>
+        <p:nvSpPr>
+          <p:cNvPr id="15" name="TextBox 14"/>
+          <p:cNvSpPr txBox="1"/>
+          <p:nvPr/>
+        </p:nvSpPr>
+        <p:spPr>
+          <a:xfrm>
+            <a:off x="731520" y="4754880"/>
+            <a:ext cx="10698480" cy="1280160"/>
+          </a:xfrm>
+          <a:prstGeom prst="rect">
+            <a:avLst/>
+          </a:prstGeom>
+          <a:noFill/>
+        </p:spPr>
+        <p:txBody>
+          <a:bodyPr wrap="square">
+            <a:spAutoFit/>
+          </a:bodyPr>
+          <a:lstStyle/>
+          <a:p>
+            <a:pPr algn="ctr">
+              <a:spcAft>
+                <a:spcPts val="600"/>
+              </a:spcAft>
+            </a:pPr>
+            <a:r>
+              <a:rPr sz="1500" b="0">
+                <a:solidFill>
+                  <a:srgbClr val="243056"/>
+                </a:solidFill>
+                <a:latin typeface="Yu Mincho"/>
+                <a:ea typeface="Yu Mincho"/>
+              </a:rPr>
+              <a:t>口コミの量ではなく、「誰が、どんな基準で選ぶか」。</a:t>
+            </a:r>
+          </a:p>
+          <a:p>
+            <a:pPr algn="ctr">
+              <a:spcAft>
+                <a:spcPts val="0"/>
+              </a:spcAft>
+            </a:pPr>
+            <a:r>
+              <a:rPr sz="1400" b="0">
+                <a:solidFill>
+                  <a:srgbClr val="6B5E4E"/>
+                </a:solidFill>
+                <a:latin typeface="Yu Gothic"/>
+                <a:ea typeface="Yu Gothic"/>
+              </a:rPr>
+              <a:t>Restaurant と Gift に絞る。</a:t>
             </a:r>
           </a:p>
         </p:txBody>
@@ -5977,7 +5974,7 @@
                 <a:latin typeface="Yu Gothic"/>
                 <a:ea typeface="Yu Gothic"/>
               </a:rPr>
-              <a:t>作ったもの｜About M</a:t>
+              <a:t>作ったもの</a:t>
             </a:r>
           </a:p>
         </p:txBody>
@@ -6017,7 +6014,7 @@
                 <a:latin typeface="Yu Mincho"/>
                 <a:ea typeface="Yu Mincho"/>
               </a:rPr>
-              <a:t>誰が、どんな基準で選ぶか</a:t>
+              <a:t>見る・探すは公開。直すのは自分用</a:t>
             </a:r>
           </a:p>
         </p:txBody>
@@ -6030,7 +6027,7 @@
         </p:nvSpPr>
         <p:spPr>
           <a:xfrm>
-            <a:off x="4937760" y="1051560"/>
+            <a:off x="4937760" y="960120"/>
             <a:ext cx="2286000" cy="15240"/>
           </a:xfrm>
           <a:prstGeom prst="rect">
@@ -6073,7 +6070,7 @@
         </p:nvSpPr>
         <p:spPr>
           <a:xfrm>
-            <a:off x="5943600" y="1000760"/>
+            <a:off x="5943600" y="909320"/>
             <a:ext cx="127000" cy="127000"/>
           </a:xfrm>
           <a:prstGeom prst="diamond">
@@ -6118,8 +6115,8 @@
         </p:nvSpPr>
         <p:spPr>
           <a:xfrm>
-            <a:off x="1737360" y="1280160"/>
-            <a:ext cx="8686800" cy="4892040"/>
+            <a:off x="1862175" y="1078992"/>
+            <a:ext cx="4160520" cy="2852928"/>
           </a:xfrm>
           <a:prstGeom prst="rect">
             <a:avLst/>
@@ -6157,7 +6154,7 @@
       </p:sp>
       <p:pic>
         <p:nvPicPr>
-          <p:cNvPr id="7" name="Picture 6" descr="about-page-desktop.png"/>
+          <p:cNvPr id="7" name="Picture 6" descr="_verify-home.png"/>
           <p:cNvPicPr>
             <a:picLocks noChangeAspect="1"/>
           </p:cNvPicPr>
@@ -6171,8 +6168,8 @@
         </p:blipFill>
         <p:spPr>
           <a:xfrm>
-            <a:off x="2810053" y="1316736"/>
-            <a:ext cx="6541414" cy="4599432"/>
+            <a:off x="1951075" y="1115568"/>
+            <a:ext cx="3982720" cy="2560320"/>
           </a:xfrm>
           <a:prstGeom prst="rect">
             <a:avLst/>
@@ -6187,8 +6184,8 @@
         </p:nvSpPr>
         <p:spPr>
           <a:xfrm>
-            <a:off x="1810512" y="5916168"/>
-            <a:ext cx="8540496" cy="256032"/>
+            <a:off x="1935327" y="3675888"/>
+            <a:ext cx="4014216" cy="256032"/>
           </a:xfrm>
           <a:prstGeom prst="rect">
             <a:avLst/>
@@ -6214,7 +6211,334 @@
                 <a:latin typeface="Yu Gothic"/>
                 <a:ea typeface="Yu Gothic"/>
               </a:rPr>
-              <a:t>公開｜About M　会食・ワイン・贈答。「美味しいだけでなく、その場にちょうどいい」</a:t>
+              <a:t>公開｜トップ　Restaurant / Gift</a:t>
+            </a:r>
+          </a:p>
+        </p:txBody>
+      </p:sp>
+      <p:sp>
+        <p:nvSpPr>
+          <p:cNvPr id="9" name="Rectangle 8"/>
+          <p:cNvSpPr/>
+          <p:nvPr/>
+        </p:nvSpPr>
+        <p:spPr>
+          <a:xfrm>
+            <a:off x="6168999" y="1078992"/>
+            <a:ext cx="4160520" cy="2852928"/>
+          </a:xfrm>
+          <a:prstGeom prst="rect">
+            <a:avLst/>
+          </a:prstGeom>
+          <a:solidFill>
+            <a:srgbClr val="FFFFFF"/>
+          </a:solidFill>
+          <a:ln w="12700">
+            <a:solidFill>
+              <a:srgbClr val="D7CCBA"/>
+            </a:solidFill>
+          </a:ln>
+        </p:spPr>
+        <p:style>
+          <a:lnRef idx="1">
+            <a:schemeClr val="accent1"/>
+          </a:lnRef>
+          <a:fillRef idx="3">
+            <a:schemeClr val="accent1"/>
+          </a:fillRef>
+          <a:effectRef idx="2">
+            <a:schemeClr val="accent1"/>
+          </a:effectRef>
+          <a:fontRef idx="minor">
+            <a:schemeClr val="lt1"/>
+          </a:fontRef>
+        </p:style>
+        <p:txBody>
+          <a:bodyPr rtlCol="0" anchor="ctr"/>
+          <a:lstStyle/>
+          <a:p>
+            <a:pPr algn="ctr"/>
+          </a:p>
+        </p:txBody>
+      </p:sp>
+      <p:pic>
+        <p:nvPicPr>
+          <p:cNvPr id="10" name="Picture 9" descr="_verify-restaurants.png"/>
+          <p:cNvPicPr>
+            <a:picLocks noChangeAspect="1"/>
+          </p:cNvPicPr>
+          <p:nvPr/>
+        </p:nvPicPr>
+        <p:blipFill>
+          <a:blip r:embed="rId3"/>
+          <a:stretch>
+            <a:fillRect/>
+          </a:stretch>
+        </p:blipFill>
+        <p:spPr>
+          <a:xfrm>
+            <a:off x="6257899" y="1115568"/>
+            <a:ext cx="3982720" cy="2560320"/>
+          </a:xfrm>
+          <a:prstGeom prst="rect">
+            <a:avLst/>
+          </a:prstGeom>
+        </p:spPr>
+      </p:pic>
+      <p:sp>
+        <p:nvSpPr>
+          <p:cNvPr id="11" name="TextBox 10"/>
+          <p:cNvSpPr txBox="1"/>
+          <p:nvPr/>
+        </p:nvSpPr>
+        <p:spPr>
+          <a:xfrm>
+            <a:off x="6242151" y="3675888"/>
+            <a:ext cx="4014216" cy="256032"/>
+          </a:xfrm>
+          <a:prstGeom prst="rect">
+            <a:avLst/>
+          </a:prstGeom>
+          <a:noFill/>
+        </p:spPr>
+        <p:txBody>
+          <a:bodyPr wrap="square">
+            <a:spAutoFit/>
+          </a:bodyPr>
+          <a:lstStyle/>
+          <a:p>
+            <a:pPr algn="l">
+              <a:spcAft>
+                <a:spcPts val="0"/>
+              </a:spcAft>
+            </a:pPr>
+            <a:r>
+              <a:rPr sz="1000" b="0">
+                <a:solidFill>
+                  <a:srgbClr val="6B5E4E"/>
+                </a:solidFill>
+                <a:latin typeface="Yu Gothic"/>
+                <a:ea typeface="Yu Gothic"/>
+              </a:rPr>
+              <a:t>公開｜Restaurant　条件・単語・音声</a:t>
+            </a:r>
+          </a:p>
+        </p:txBody>
+      </p:sp>
+      <p:sp>
+        <p:nvSpPr>
+          <p:cNvPr id="12" name="Rectangle 11"/>
+          <p:cNvSpPr/>
+          <p:nvPr/>
+        </p:nvSpPr>
+        <p:spPr>
+          <a:xfrm>
+            <a:off x="1862175" y="4023360"/>
+            <a:ext cx="4160520" cy="2852928"/>
+          </a:xfrm>
+          <a:prstGeom prst="rect">
+            <a:avLst/>
+          </a:prstGeom>
+          <a:solidFill>
+            <a:srgbClr val="FFFFFF"/>
+          </a:solidFill>
+          <a:ln w="12700">
+            <a:solidFill>
+              <a:srgbClr val="D7CCBA"/>
+            </a:solidFill>
+          </a:ln>
+        </p:spPr>
+        <p:style>
+          <a:lnRef idx="1">
+            <a:schemeClr val="accent1"/>
+          </a:lnRef>
+          <a:fillRef idx="3">
+            <a:schemeClr val="accent1"/>
+          </a:fillRef>
+          <a:effectRef idx="2">
+            <a:schemeClr val="accent1"/>
+          </a:effectRef>
+          <a:fontRef idx="minor">
+            <a:schemeClr val="lt1"/>
+          </a:fontRef>
+        </p:style>
+        <p:txBody>
+          <a:bodyPr rtlCol="0" anchor="ctr"/>
+          <a:lstStyle/>
+          <a:p>
+            <a:pPr algn="ctr"/>
+          </a:p>
+        </p:txBody>
+      </p:sp>
+      <p:pic>
+        <p:nvPicPr>
+          <p:cNvPr id="13" name="Picture 12" descr="about-visit-wishlist.png"/>
+          <p:cNvPicPr>
+            <a:picLocks noChangeAspect="1"/>
+          </p:cNvPicPr>
+          <p:nvPr/>
+        </p:nvPicPr>
+        <p:blipFill>
+          <a:blip r:embed="rId4"/>
+          <a:stretch>
+            <a:fillRect/>
+          </a:stretch>
+        </p:blipFill>
+        <p:spPr>
+          <a:xfrm>
+            <a:off x="1898751" y="4233100"/>
+            <a:ext cx="4087368" cy="2213991"/>
+          </a:xfrm>
+          <a:prstGeom prst="rect">
+            <a:avLst/>
+          </a:prstGeom>
+        </p:spPr>
+      </p:pic>
+      <p:sp>
+        <p:nvSpPr>
+          <p:cNvPr id="14" name="TextBox 13"/>
+          <p:cNvSpPr txBox="1"/>
+          <p:nvPr/>
+        </p:nvSpPr>
+        <p:spPr>
+          <a:xfrm>
+            <a:off x="1935327" y="6620256"/>
+            <a:ext cx="4014216" cy="256032"/>
+          </a:xfrm>
+          <a:prstGeom prst="rect">
+            <a:avLst/>
+          </a:prstGeom>
+          <a:noFill/>
+        </p:spPr>
+        <p:txBody>
+          <a:bodyPr wrap="square">
+            <a:spAutoFit/>
+          </a:bodyPr>
+          <a:lstStyle/>
+          <a:p>
+            <a:pPr algn="l">
+              <a:spcAft>
+                <a:spcPts val="0"/>
+              </a:spcAft>
+            </a:pPr>
+            <a:r>
+              <a:rPr sz="1000" b="0">
+                <a:solidFill>
+                  <a:srgbClr val="6B5E4E"/>
+                </a:solidFill>
+                <a:latin typeface="Yu Gothic"/>
+                <a:ea typeface="Yu Gothic"/>
+              </a:rPr>
+              <a:t>公開｜Visit / Wishlist　店舗ステータス</a:t>
+            </a:r>
+          </a:p>
+        </p:txBody>
+      </p:sp>
+      <p:sp>
+        <p:nvSpPr>
+          <p:cNvPr id="15" name="Rectangle 14"/>
+          <p:cNvSpPr/>
+          <p:nvPr/>
+        </p:nvSpPr>
+        <p:spPr>
+          <a:xfrm>
+            <a:off x="6168999" y="4023360"/>
+            <a:ext cx="4160520" cy="2852928"/>
+          </a:xfrm>
+          <a:prstGeom prst="rect">
+            <a:avLst/>
+          </a:prstGeom>
+          <a:solidFill>
+            <a:srgbClr val="FFFFFF"/>
+          </a:solidFill>
+          <a:ln w="12700">
+            <a:solidFill>
+              <a:srgbClr val="D7CCBA"/>
+            </a:solidFill>
+          </a:ln>
+        </p:spPr>
+        <p:style>
+          <a:lnRef idx="1">
+            <a:schemeClr val="accent1"/>
+          </a:lnRef>
+          <a:fillRef idx="3">
+            <a:schemeClr val="accent1"/>
+          </a:fillRef>
+          <a:effectRef idx="2">
+            <a:schemeClr val="accent1"/>
+          </a:effectRef>
+          <a:fontRef idx="minor">
+            <a:schemeClr val="lt1"/>
+          </a:fontRef>
+        </p:style>
+        <p:txBody>
+          <a:bodyPr rtlCol="0" anchor="ctr"/>
+          <a:lstStyle/>
+          <a:p>
+            <a:pPr algn="ctr"/>
+          </a:p>
+        </p:txBody>
+      </p:sp>
+      <p:pic>
+        <p:nvPicPr>
+          <p:cNvPr id="16" name="Picture 15" descr="_verify-edit.png"/>
+          <p:cNvPicPr>
+            <a:picLocks noChangeAspect="1"/>
+          </p:cNvPicPr>
+          <p:nvPr/>
+        </p:nvPicPr>
+        <p:blipFill>
+          <a:blip r:embed="rId5"/>
+          <a:stretch>
+            <a:fillRect/>
+          </a:stretch>
+        </p:blipFill>
+        <p:spPr>
+          <a:xfrm>
+            <a:off x="6428587" y="4059936"/>
+            <a:ext cx="3641344" cy="2560320"/>
+          </a:xfrm>
+          <a:prstGeom prst="rect">
+            <a:avLst/>
+          </a:prstGeom>
+        </p:spPr>
+      </p:pic>
+      <p:sp>
+        <p:nvSpPr>
+          <p:cNvPr id="17" name="TextBox 16"/>
+          <p:cNvSpPr txBox="1"/>
+          <p:nvPr/>
+        </p:nvSpPr>
+        <p:spPr>
+          <a:xfrm>
+            <a:off x="6242151" y="6620256"/>
+            <a:ext cx="4014216" cy="256032"/>
+          </a:xfrm>
+          <a:prstGeom prst="rect">
+            <a:avLst/>
+          </a:prstGeom>
+          <a:noFill/>
+        </p:spPr>
+        <p:txBody>
+          <a:bodyPr wrap="square">
+            <a:spAutoFit/>
+          </a:bodyPr>
+          <a:lstStyle/>
+          <a:p>
+            <a:pPr algn="l">
+              <a:spcAft>
+                <a:spcPts val="0"/>
+              </a:spcAft>
+            </a:pPr>
+            <a:r>
+              <a:rPr sz="1000" b="0">
+                <a:solidFill>
+                  <a:srgbClr val="6B5E4E"/>
+                </a:solidFill>
+                <a:latin typeface="Yu Gothic"/>
+                <a:ea typeface="Yu Gothic"/>
+              </a:rPr>
+              <a:t>入力｜非公開 /edit　フォームから移した</a:t>
             </a:r>
           </a:p>
         </p:txBody>
@@ -6280,7 +6604,7 @@
                 <a:latin typeface="Yu Gothic"/>
                 <a:ea typeface="Yu Gothic"/>
               </a:rPr>
-              <a:t>作ったもの｜設計</a:t>
+              <a:t>作ったもの｜About M</a:t>
             </a:r>
           </a:p>
         </p:txBody>
@@ -6320,7 +6644,7 @@
                 <a:latin typeface="Yu Mincho"/>
                 <a:ea typeface="Yu Mincho"/>
               </a:rPr>
-              <a:t>役割を分けて、目利きを価値にした</a:t>
+              <a:t>誰が、どんな基準で選ぶか</a:t>
             </a:r>
           </a:p>
         </p:txBody>
@@ -6415,19 +6739,17 @@
       </p:sp>
       <p:sp>
         <p:nvSpPr>
-          <p:cNvPr id="6" name="Rounded Rectangle 5"/>
+          <p:cNvPr id="6" name="Rectangle 5"/>
           <p:cNvSpPr/>
           <p:nvPr/>
         </p:nvSpPr>
         <p:spPr>
           <a:xfrm>
-            <a:off x="640080" y="1371600"/>
-            <a:ext cx="5349240" cy="2194560"/>
-          </a:xfrm>
-          <a:prstGeom prst="roundRect">
-            <a:avLst>
-              <a:gd name="adj" fmla="val 8000"/>
-            </a:avLst>
+            <a:off x="1737360" y="1280160"/>
+            <a:ext cx="8686800" cy="4892040"/>
+          </a:xfrm>
+          <a:prstGeom prst="rect">
+            <a:avLst/>
           </a:prstGeom>
           <a:solidFill>
             <a:srgbClr val="FFFFFF"/>
@@ -6460,16 +6782,40 @@
           </a:p>
         </p:txBody>
       </p:sp>
-      <p:sp>
-        <p:nvSpPr>
-          <p:cNvPr id="7" name="TextBox 6"/>
+      <p:pic>
+        <p:nvPicPr>
+          <p:cNvPr id="7" name="Picture 6" descr="about-page-desktop.png"/>
+          <p:cNvPicPr>
+            <a:picLocks noChangeAspect="1"/>
+          </p:cNvPicPr>
+          <p:nvPr/>
+        </p:nvPicPr>
+        <p:blipFill>
+          <a:blip r:embed="rId2"/>
+          <a:stretch>
+            <a:fillRect/>
+          </a:stretch>
+        </p:blipFill>
+        <p:spPr>
+          <a:xfrm>
+            <a:off x="2810053" y="1316736"/>
+            <a:ext cx="6541414" cy="4599432"/>
+          </a:xfrm>
+          <a:prstGeom prst="rect">
+            <a:avLst/>
+          </a:prstGeom>
+        </p:spPr>
+      </p:pic>
+      <p:sp>
+        <p:nvSpPr>
+          <p:cNvPr id="8" name="TextBox 7"/>
           <p:cNvSpPr txBox="1"/>
           <p:nvPr/>
         </p:nvSpPr>
         <p:spPr>
           <a:xfrm>
-            <a:off x="786384" y="1499616"/>
-            <a:ext cx="5056632" cy="329184"/>
+            <a:off x="1810512" y="5916168"/>
+            <a:ext cx="8540496" cy="256032"/>
           </a:xfrm>
           <a:prstGeom prst="rect">
             <a:avLst/>
@@ -6488,435 +6834,14 @@
               </a:spcAft>
             </a:pPr>
             <a:r>
-              <a:rPr sz="1400" b="0">
-                <a:solidFill>
-                  <a:srgbClr val="243056"/>
-                </a:solidFill>
-                <a:latin typeface="Yu Mincho"/>
-                <a:ea typeface="Yu Mincho"/>
-              </a:rPr>
-              <a:t>Visit / Wishlist と Choice</a:t>
-            </a:r>
-          </a:p>
-        </p:txBody>
-      </p:sp>
-      <p:sp>
-        <p:nvSpPr>
-          <p:cNvPr id="8" name="TextBox 7"/>
-          <p:cNvSpPr txBox="1"/>
-          <p:nvPr/>
-        </p:nvSpPr>
-        <p:spPr>
-          <a:xfrm>
-            <a:off x="786384" y="1828800"/>
-            <a:ext cx="5056632" cy="1627632"/>
-          </a:xfrm>
-          <a:prstGeom prst="rect">
-            <a:avLst/>
-          </a:prstGeom>
-          <a:noFill/>
-        </p:spPr>
-        <p:txBody>
-          <a:bodyPr wrap="square">
-            <a:spAutoFit/>
-          </a:bodyPr>
-          <a:lstStyle/>
-          <a:p>
-            <a:pPr algn="l">
-              <a:spcAft>
-                <a:spcPts val="0"/>
-              </a:spcAft>
-            </a:pPr>
-            <a:r>
-              <a:rPr sz="1300" b="0">
+              <a:rPr sz="1000" b="0">
                 <a:solidFill>
                   <a:srgbClr val="6B5E4E"/>
                 </a:solidFill>
                 <a:latin typeface="Yu Gothic"/>
                 <a:ea typeface="Yu Gothic"/>
               </a:rPr>
-              <a:t>Visit＝実際に訪問。Wishlist＝行ってみたい。店舗のステータス。Choiceは特集で、ステータスではない。例：個室で接待、グラスでワイン、日持ちする手土産。</a:t>
-            </a:r>
-          </a:p>
-        </p:txBody>
-      </p:sp>
-      <p:sp>
-        <p:nvSpPr>
-          <p:cNvPr id="9" name="Rounded Rectangle 8"/>
-          <p:cNvSpPr/>
-          <p:nvPr/>
-        </p:nvSpPr>
-        <p:spPr>
-          <a:xfrm>
-            <a:off x="6172200" y="1371600"/>
-            <a:ext cx="5349240" cy="2194560"/>
-          </a:xfrm>
-          <a:prstGeom prst="roundRect">
-            <a:avLst>
-              <a:gd name="adj" fmla="val 8000"/>
-            </a:avLst>
-          </a:prstGeom>
-          <a:solidFill>
-            <a:srgbClr val="FFFFFF"/>
-          </a:solidFill>
-          <a:ln w="12700">
-            <a:solidFill>
-              <a:srgbClr val="D7CCBA"/>
-            </a:solidFill>
-          </a:ln>
-        </p:spPr>
-        <p:style>
-          <a:lnRef idx="1">
-            <a:schemeClr val="accent1"/>
-          </a:lnRef>
-          <a:fillRef idx="3">
-            <a:schemeClr val="accent1"/>
-          </a:fillRef>
-          <a:effectRef idx="2">
-            <a:schemeClr val="accent1"/>
-          </a:effectRef>
-          <a:fontRef idx="minor">
-            <a:schemeClr val="lt1"/>
-          </a:fontRef>
-        </p:style>
-        <p:txBody>
-          <a:bodyPr rtlCol="0" anchor="ctr"/>
-          <a:lstStyle/>
-          <a:p>
-            <a:pPr algn="ctr"/>
-          </a:p>
-        </p:txBody>
-      </p:sp>
-      <p:sp>
-        <p:nvSpPr>
-          <p:cNvPr id="10" name="TextBox 9"/>
-          <p:cNvSpPr txBox="1"/>
-          <p:nvPr/>
-        </p:nvSpPr>
-        <p:spPr>
-          <a:xfrm>
-            <a:off x="6318504" y="1499616"/>
-            <a:ext cx="5056632" cy="329184"/>
-          </a:xfrm>
-          <a:prstGeom prst="rect">
-            <a:avLst/>
-          </a:prstGeom>
-          <a:noFill/>
-        </p:spPr>
-        <p:txBody>
-          <a:bodyPr wrap="square">
-            <a:spAutoFit/>
-          </a:bodyPr>
-          <a:lstStyle/>
-          <a:p>
-            <a:pPr algn="l">
-              <a:spcAft>
-                <a:spcPts val="0"/>
-              </a:spcAft>
-            </a:pPr>
-            <a:r>
-              <a:rPr sz="1400" b="0">
-                <a:solidFill>
-                  <a:srgbClr val="243056"/>
-                </a:solidFill>
-                <a:latin typeface="Yu Mincho"/>
-                <a:ea typeface="Yu Mincho"/>
-              </a:rPr>
-              <a:t>About M</a:t>
-            </a:r>
-          </a:p>
-        </p:txBody>
-      </p:sp>
-      <p:sp>
-        <p:nvSpPr>
-          <p:cNvPr id="11" name="TextBox 10"/>
-          <p:cNvSpPr txBox="1"/>
-          <p:nvPr/>
-        </p:nvSpPr>
-        <p:spPr>
-          <a:xfrm>
-            <a:off x="6318504" y="1828800"/>
-            <a:ext cx="5056632" cy="1627632"/>
-          </a:xfrm>
-          <a:prstGeom prst="rect">
-            <a:avLst/>
-          </a:prstGeom>
-          <a:noFill/>
-        </p:spPr>
-        <p:txBody>
-          <a:bodyPr wrap="square">
-            <a:spAutoFit/>
-          </a:bodyPr>
-          <a:lstStyle/>
-          <a:p>
-            <a:pPr algn="l">
-              <a:spcAft>
-                <a:spcPts val="0"/>
-              </a:spcAft>
-            </a:pPr>
-            <a:r>
-              <a:rPr sz="1300" b="0">
-                <a:solidFill>
-                  <a:srgbClr val="6B5E4E"/>
-                </a:solidFill>
-                <a:latin typeface="Yu Gothic"/>
-                <a:ea typeface="Yu Gothic"/>
-              </a:rPr>
-              <a:t>口コミの量では勝負しない。「誰が、どんな経験と基準で選ぶか」。出版社の広告営業で数多くの会食＋ワイン・贈答。「美味しいだけでなく、その場にちょうどいい」。</a:t>
-            </a:r>
-          </a:p>
-        </p:txBody>
-      </p:sp>
-      <p:sp>
-        <p:nvSpPr>
-          <p:cNvPr id="12" name="Rounded Rectangle 11"/>
-          <p:cNvSpPr/>
-          <p:nvPr/>
-        </p:nvSpPr>
-        <p:spPr>
-          <a:xfrm>
-            <a:off x="640080" y="3749039"/>
-            <a:ext cx="5349240" cy="2331720"/>
-          </a:xfrm>
-          <a:prstGeom prst="roundRect">
-            <a:avLst>
-              <a:gd name="adj" fmla="val 8000"/>
-            </a:avLst>
-          </a:prstGeom>
-          <a:solidFill>
-            <a:srgbClr val="FFFFFF"/>
-          </a:solidFill>
-          <a:ln w="12700">
-            <a:solidFill>
-              <a:srgbClr val="D7CCBA"/>
-            </a:solidFill>
-          </a:ln>
-        </p:spPr>
-        <p:style>
-          <a:lnRef idx="1">
-            <a:schemeClr val="accent1"/>
-          </a:lnRef>
-          <a:fillRef idx="3">
-            <a:schemeClr val="accent1"/>
-          </a:fillRef>
-          <a:effectRef idx="2">
-            <a:schemeClr val="accent1"/>
-          </a:effectRef>
-          <a:fontRef idx="minor">
-            <a:schemeClr val="lt1"/>
-          </a:fontRef>
-        </p:style>
-        <p:txBody>
-          <a:bodyPr rtlCol="0" anchor="ctr"/>
-          <a:lstStyle/>
-          <a:p>
-            <a:pPr algn="ctr"/>
-          </a:p>
-        </p:txBody>
-      </p:sp>
-      <p:sp>
-        <p:nvSpPr>
-          <p:cNvPr id="13" name="TextBox 12"/>
-          <p:cNvSpPr txBox="1"/>
-          <p:nvPr/>
-        </p:nvSpPr>
-        <p:spPr>
-          <a:xfrm>
-            <a:off x="786384" y="3877055"/>
-            <a:ext cx="5056632" cy="329184"/>
-          </a:xfrm>
-          <a:prstGeom prst="rect">
-            <a:avLst/>
-          </a:prstGeom>
-          <a:noFill/>
-        </p:spPr>
-        <p:txBody>
-          <a:bodyPr wrap="square">
-            <a:spAutoFit/>
-          </a:bodyPr>
-          <a:lstStyle/>
-          <a:p>
-            <a:pPr algn="l">
-              <a:spcAft>
-                <a:spcPts val="0"/>
-              </a:spcAft>
-            </a:pPr>
-            <a:r>
-              <a:rPr sz="1400" b="0">
-                <a:solidFill>
-                  <a:srgbClr val="243056"/>
-                </a:solidFill>
-                <a:latin typeface="Yu Mincho"/>
-                <a:ea typeface="Yu Mincho"/>
-              </a:rPr>
-              <a:t>入力を非公開アプリへ</a:t>
-            </a:r>
-          </a:p>
-        </p:txBody>
-      </p:sp>
-      <p:sp>
-        <p:nvSpPr>
-          <p:cNvPr id="14" name="TextBox 13"/>
-          <p:cNvSpPr txBox="1"/>
-          <p:nvPr/>
-        </p:nvSpPr>
-        <p:spPr>
-          <a:xfrm>
-            <a:off x="786384" y="4206239"/>
-            <a:ext cx="5056632" cy="1764792"/>
-          </a:xfrm>
-          <a:prstGeom prst="rect">
-            <a:avLst/>
-          </a:prstGeom>
-          <a:noFill/>
-        </p:spPr>
-        <p:txBody>
-          <a:bodyPr wrap="square">
-            <a:spAutoFit/>
-          </a:bodyPr>
-          <a:lstStyle/>
-          <a:p>
-            <a:pPr algn="l">
-              <a:spcAft>
-                <a:spcPts val="0"/>
-              </a:spcAft>
-            </a:pPr>
-            <a:r>
-              <a:rPr sz="1300" b="0">
-                <a:solidFill>
-                  <a:srgbClr val="6B5E4E"/>
-                </a:solidFill>
-                <a:latin typeface="Yu Gothic"/>
-                <a:ea typeface="Yu Gothic"/>
-              </a:rPr>
-              <a:t>当初は Google フォーム。いまは非公開の /edit から入力・修正。来客向けから登録・直すを外した。アプリで直しても、シートに残る。</a:t>
-            </a:r>
-          </a:p>
-        </p:txBody>
-      </p:sp>
-      <p:sp>
-        <p:nvSpPr>
-          <p:cNvPr id="15" name="Rounded Rectangle 14"/>
-          <p:cNvSpPr/>
-          <p:nvPr/>
-        </p:nvSpPr>
-        <p:spPr>
-          <a:xfrm>
-            <a:off x="6172200" y="3749039"/>
-            <a:ext cx="5349240" cy="2331720"/>
-          </a:xfrm>
-          <a:prstGeom prst="roundRect">
-            <a:avLst>
-              <a:gd name="adj" fmla="val 8000"/>
-            </a:avLst>
-          </a:prstGeom>
-          <a:solidFill>
-            <a:srgbClr val="FFFFFF"/>
-          </a:solidFill>
-          <a:ln w="12700">
-            <a:solidFill>
-              <a:srgbClr val="D7CCBA"/>
-            </a:solidFill>
-          </a:ln>
-        </p:spPr>
-        <p:style>
-          <a:lnRef idx="1">
-            <a:schemeClr val="accent1"/>
-          </a:lnRef>
-          <a:fillRef idx="3">
-            <a:schemeClr val="accent1"/>
-          </a:fillRef>
-          <a:effectRef idx="2">
-            <a:schemeClr val="accent1"/>
-          </a:effectRef>
-          <a:fontRef idx="minor">
-            <a:schemeClr val="lt1"/>
-          </a:fontRef>
-        </p:style>
-        <p:txBody>
-          <a:bodyPr rtlCol="0" anchor="ctr"/>
-          <a:lstStyle/>
-          <a:p>
-            <a:pPr algn="ctr"/>
-          </a:p>
-        </p:txBody>
-      </p:sp>
-      <p:sp>
-        <p:nvSpPr>
-          <p:cNvPr id="16" name="TextBox 15"/>
-          <p:cNvSpPr txBox="1"/>
-          <p:nvPr/>
-        </p:nvSpPr>
-        <p:spPr>
-          <a:xfrm>
-            <a:off x="6318504" y="3877055"/>
-            <a:ext cx="5056632" cy="329184"/>
-          </a:xfrm>
-          <a:prstGeom prst="rect">
-            <a:avLst/>
-          </a:prstGeom>
-          <a:noFill/>
-        </p:spPr>
-        <p:txBody>
-          <a:bodyPr wrap="square">
-            <a:spAutoFit/>
-          </a:bodyPr>
-          <a:lstStyle/>
-          <a:p>
-            <a:pPr algn="l">
-              <a:spcAft>
-                <a:spcPts val="0"/>
-              </a:spcAft>
-            </a:pPr>
-            <a:r>
-              <a:rPr sz="1400" b="0">
-                <a:solidFill>
-                  <a:srgbClr val="243056"/>
-                </a:solidFill>
-                <a:latin typeface="Yu Mincho"/>
-                <a:ea typeface="Yu Mincho"/>
-              </a:rPr>
-              <a:t>デザイン</a:t>
-            </a:r>
-          </a:p>
-        </p:txBody>
-      </p:sp>
-      <p:sp>
-        <p:nvSpPr>
-          <p:cNvPr id="17" name="TextBox 16"/>
-          <p:cNvSpPr txBox="1"/>
-          <p:nvPr/>
-        </p:nvSpPr>
-        <p:spPr>
-          <a:xfrm>
-            <a:off x="6318504" y="4206239"/>
-            <a:ext cx="5056632" cy="1764792"/>
-          </a:xfrm>
-          <a:prstGeom prst="rect">
-            <a:avLst/>
-          </a:prstGeom>
-          <a:noFill/>
-        </p:spPr>
-        <p:txBody>
-          <a:bodyPr wrap="square">
-            <a:spAutoFit/>
-          </a:bodyPr>
-          <a:lstStyle/>
-          <a:p>
-            <a:pPr algn="l">
-              <a:spcAft>
-                <a:spcPts val="0"/>
-              </a:spcAft>
-            </a:pPr>
-            <a:r>
-              <a:rPr sz="1300" b="0">
-                <a:solidFill>
-                  <a:srgbClr val="6B5E4E"/>
-                </a:solidFill>
-                <a:latin typeface="Yu Gothic"/>
-                <a:ea typeface="Yu Gothic"/>
-              </a:rPr>
-              <a:t>見た目は AI（Cursor）で作った。かわいい案から、上質・知的・ニュートラルへ。アイボリー／ネイビー／控えめなゴールド。店を探す AI API とは別。</a:t>
+              <a:t>公開｜About M　会食・ワイン・贈答。「美味しいだけでなく、その場にちょうどいい」</a:t>
             </a:r>
           </a:p>
         </p:txBody>
@@ -6982,7 +6907,7 @@
                 <a:latin typeface="Yu Gothic"/>
                 <a:ea typeface="Yu Gothic"/>
               </a:rPr>
-              <a:t>開発で工夫したこと</a:t>
+              <a:t>工夫したポイントと苦戦したポイント</a:t>
             </a:r>
           </a:p>
         </p:txBody>
@@ -7123,12 +7048,12 @@
         </p:nvSpPr>
         <p:spPr>
           <a:xfrm>
-            <a:off x="411480" y="1371600"/>
-            <a:ext cx="2148840" cy="1965960"/>
+            <a:off x="640080" y="1371600"/>
+            <a:ext cx="5349240" cy="1965960"/>
           </a:xfrm>
           <a:prstGeom prst="roundRect">
             <a:avLst>
-              <a:gd name="adj" fmla="val 10000"/>
+              <a:gd name="adj" fmla="val 8000"/>
             </a:avLst>
           </a:prstGeom>
           <a:solidFill>
@@ -7164,59 +7089,14 @@
       </p:sp>
       <p:sp>
         <p:nvSpPr>
-          <p:cNvPr id="7" name="Oval 6"/>
-          <p:cNvSpPr/>
-          <p:nvPr/>
-        </p:nvSpPr>
-        <p:spPr>
-          <a:xfrm>
-            <a:off x="1280160" y="1481328"/>
-            <a:ext cx="384048" cy="384048"/>
-          </a:xfrm>
-          <a:prstGeom prst="ellipse">
-            <a:avLst/>
-          </a:prstGeom>
-          <a:solidFill>
-            <a:srgbClr val="FBF8F2"/>
-          </a:solidFill>
-          <a:ln w="12700">
-            <a:solidFill>
-              <a:srgbClr val="C4A36A"/>
-            </a:solidFill>
-          </a:ln>
-        </p:spPr>
-        <p:style>
-          <a:lnRef idx="1">
-            <a:schemeClr val="accent1"/>
-          </a:lnRef>
-          <a:fillRef idx="3">
-            <a:schemeClr val="accent1"/>
-          </a:fillRef>
-          <a:effectRef idx="2">
-            <a:schemeClr val="accent1"/>
-          </a:effectRef>
-          <a:fontRef idx="minor">
-            <a:schemeClr val="lt1"/>
-          </a:fontRef>
-        </p:style>
-        <p:txBody>
-          <a:bodyPr rtlCol="0" anchor="ctr"/>
-          <a:lstStyle/>
-          <a:p>
-            <a:pPr algn="ctr"/>
-          </a:p>
-        </p:txBody>
-      </p:sp>
-      <p:sp>
-        <p:nvSpPr>
-          <p:cNvPr id="8" name="TextBox 7"/>
+          <p:cNvPr id="7" name="TextBox 6"/>
           <p:cNvSpPr txBox="1"/>
           <p:nvPr/>
         </p:nvSpPr>
         <p:spPr>
           <a:xfrm>
-            <a:off x="1280160" y="1517904"/>
-            <a:ext cx="384048" cy="347472"/>
+            <a:off x="786384" y="1499616"/>
+            <a:ext cx="5056632" cy="329184"/>
           </a:xfrm>
           <a:prstGeom prst="rect">
             <a:avLst/>
@@ -7229,34 +7109,34 @@
           </a:bodyPr>
           <a:lstStyle/>
           <a:p>
-            <a:pPr algn="ctr">
+            <a:pPr algn="l">
               <a:spcAft>
                 <a:spcPts val="0"/>
               </a:spcAft>
             </a:pPr>
             <a:r>
-              <a:rPr sz="1100" b="0">
+              <a:rPr sz="1400" b="0">
                 <a:solidFill>
                   <a:srgbClr val="243056"/>
                 </a:solidFill>
-                <a:latin typeface="Yu Gothic"/>
-                <a:ea typeface="Yu Gothic"/>
+                <a:latin typeface="Yu Mincho"/>
+                <a:ea typeface="Yu Mincho"/>
               </a:rPr>
-              <a:t>1</a:t>
-            </a:r>
-          </a:p>
-        </p:txBody>
-      </p:sp>
-      <p:sp>
-        <p:nvSpPr>
-          <p:cNvPr id="9" name="TextBox 8"/>
+              <a:t>データ化</a:t>
+            </a:r>
+          </a:p>
+        </p:txBody>
+      </p:sp>
+      <p:sp>
+        <p:nvSpPr>
+          <p:cNvPr id="8" name="TextBox 7"/>
           <p:cNvSpPr txBox="1"/>
           <p:nvPr/>
         </p:nvSpPr>
         <p:spPr>
           <a:xfrm>
-            <a:off x="502920" y="1965960"/>
-            <a:ext cx="1965960" cy="365760"/>
+            <a:off x="786384" y="1828800"/>
+            <a:ext cx="5056632" cy="1399032"/>
           </a:xfrm>
           <a:prstGeom prst="rect">
             <a:avLst/>
@@ -7269,118 +7149,38 @@
           </a:bodyPr>
           <a:lstStyle/>
           <a:p>
-            <a:pPr algn="ctr">
+            <a:pPr algn="l">
               <a:spcAft>
                 <a:spcPts val="0"/>
               </a:spcAft>
             </a:pPr>
             <a:r>
-              <a:rPr sz="1400" b="0">
-                <a:solidFill>
-                  <a:srgbClr val="243056"/>
-                </a:solidFill>
-                <a:latin typeface="Yu Mincho"/>
-                <a:ea typeface="Yu Mincho"/>
-              </a:rPr>
-              <a:t>経験</a:t>
-            </a:r>
-          </a:p>
-        </p:txBody>
-      </p:sp>
-      <p:sp>
-        <p:nvSpPr>
-          <p:cNvPr id="10" name="TextBox 9"/>
-          <p:cNvSpPr txBox="1"/>
-          <p:nvPr/>
-        </p:nvSpPr>
-        <p:spPr>
-          <a:xfrm>
-            <a:off x="502920" y="2331720"/>
-            <a:ext cx="1965960" cy="777240"/>
-          </a:xfrm>
-          <a:prstGeom prst="rect">
-            <a:avLst/>
-          </a:prstGeom>
-          <a:noFill/>
-        </p:spPr>
-        <p:txBody>
-          <a:bodyPr wrap="square">
-            <a:spAutoFit/>
-          </a:bodyPr>
-          <a:lstStyle/>
-          <a:p>
-            <a:pPr algn="ctr">
-              <a:spcAft>
-                <a:spcPts val="0"/>
-              </a:spcAft>
-            </a:pPr>
-            <a:r>
-              <a:rPr sz="1200" b="0">
+              <a:rPr sz="1300" b="0">
                 <a:solidFill>
                   <a:srgbClr val="6B5E4E"/>
                 </a:solidFill>
                 <a:latin typeface="Yu Gothic"/>
                 <a:ea typeface="Yu Gothic"/>
               </a:rPr>
-              <a:t>頭の中の相談と選定</a:t>
-            </a:r>
-          </a:p>
-        </p:txBody>
-      </p:sp>
-      <p:sp>
-        <p:nvSpPr>
-          <p:cNvPr id="11" name="TextBox 10"/>
-          <p:cNvSpPr txBox="1"/>
-          <p:nvPr/>
-        </p:nvSpPr>
-        <p:spPr>
-          <a:xfrm>
-            <a:off x="2423160" y="2011680"/>
-            <a:ext cx="365760" cy="365760"/>
-          </a:xfrm>
-          <a:prstGeom prst="rect">
-            <a:avLst/>
-          </a:prstGeom>
-          <a:noFill/>
-        </p:spPr>
-        <p:txBody>
-          <a:bodyPr wrap="square">
-            <a:spAutoFit/>
-          </a:bodyPr>
-          <a:lstStyle/>
-          <a:p>
-            <a:pPr algn="ctr">
-              <a:spcAft>
-                <a:spcPts val="0"/>
-              </a:spcAft>
-            </a:pPr>
-            <a:r>
-              <a:rPr sz="1600" b="0">
-                <a:solidFill>
-                  <a:srgbClr val="C4A36A"/>
-                </a:solidFill>
-                <a:latin typeface="Yu Gothic"/>
-                <a:ea typeface="Yu Gothic"/>
-              </a:rPr>
-              <a:t>→</a:t>
-            </a:r>
-          </a:p>
-        </p:txBody>
-      </p:sp>
-      <p:sp>
-        <p:nvSpPr>
-          <p:cNvPr id="12" name="Rounded Rectangle 11"/>
+              <a:t>メモ保存ではなく、呼び出せる項目にする。Visit＝実際に訪問。Wishlist＝行ってみたい。Choiceは特集で、ステータスではない。</a:t>
+            </a:r>
+          </a:p>
+        </p:txBody>
+      </p:sp>
+      <p:sp>
+        <p:nvSpPr>
+          <p:cNvPr id="9" name="Rounded Rectangle 8"/>
           <p:cNvSpPr/>
           <p:nvPr/>
         </p:nvSpPr>
         <p:spPr>
           <a:xfrm>
-            <a:off x="2743200" y="1371600"/>
-            <a:ext cx="2148840" cy="1965960"/>
+            <a:off x="6172200" y="1371600"/>
+            <a:ext cx="5349240" cy="1965960"/>
           </a:xfrm>
           <a:prstGeom prst="roundRect">
             <a:avLst>
-              <a:gd name="adj" fmla="val 10000"/>
+              <a:gd name="adj" fmla="val 8000"/>
             </a:avLst>
           </a:prstGeom>
           <a:solidFill>
@@ -7416,59 +7216,14 @@
       </p:sp>
       <p:sp>
         <p:nvSpPr>
-          <p:cNvPr id="13" name="Oval 12"/>
-          <p:cNvSpPr/>
-          <p:nvPr/>
-        </p:nvSpPr>
-        <p:spPr>
-          <a:xfrm>
-            <a:off x="3611880" y="1481328"/>
-            <a:ext cx="384048" cy="384048"/>
-          </a:xfrm>
-          <a:prstGeom prst="ellipse">
-            <a:avLst/>
-          </a:prstGeom>
-          <a:solidFill>
-            <a:srgbClr val="FBF8F2"/>
-          </a:solidFill>
-          <a:ln w="12700">
-            <a:solidFill>
-              <a:srgbClr val="C4A36A"/>
-            </a:solidFill>
-          </a:ln>
-        </p:spPr>
-        <p:style>
-          <a:lnRef idx="1">
-            <a:schemeClr val="accent1"/>
-          </a:lnRef>
-          <a:fillRef idx="3">
-            <a:schemeClr val="accent1"/>
-          </a:fillRef>
-          <a:effectRef idx="2">
-            <a:schemeClr val="accent1"/>
-          </a:effectRef>
-          <a:fontRef idx="minor">
-            <a:schemeClr val="lt1"/>
-          </a:fontRef>
-        </p:style>
-        <p:txBody>
-          <a:bodyPr rtlCol="0" anchor="ctr"/>
-          <a:lstStyle/>
-          <a:p>
-            <a:pPr algn="ctr"/>
-          </a:p>
-        </p:txBody>
-      </p:sp>
-      <p:sp>
-        <p:nvSpPr>
-          <p:cNvPr id="14" name="TextBox 13"/>
+          <p:cNvPr id="10" name="TextBox 9"/>
           <p:cNvSpPr txBox="1"/>
           <p:nvPr/>
         </p:nvSpPr>
         <p:spPr>
           <a:xfrm>
-            <a:off x="3611880" y="1517904"/>
-            <a:ext cx="384048" cy="347472"/>
+            <a:off x="6318504" y="1499616"/>
+            <a:ext cx="5056632" cy="329184"/>
           </a:xfrm>
           <a:prstGeom prst="rect">
             <a:avLst/>
@@ -7481,34 +7236,34 @@
           </a:bodyPr>
           <a:lstStyle/>
           <a:p>
-            <a:pPr algn="ctr">
+            <a:pPr algn="l">
               <a:spcAft>
                 <a:spcPts val="0"/>
               </a:spcAft>
             </a:pPr>
             <a:r>
-              <a:rPr sz="1100" b="0">
+              <a:rPr sz="1400" b="0">
                 <a:solidFill>
                   <a:srgbClr val="243056"/>
                 </a:solidFill>
-                <a:latin typeface="Yu Gothic"/>
-                <a:ea typeface="Yu Gothic"/>
+                <a:latin typeface="Yu Mincho"/>
+                <a:ea typeface="Yu Mincho"/>
               </a:rPr>
-              <a:t>2</a:t>
-            </a:r>
-          </a:p>
-        </p:txBody>
-      </p:sp>
-      <p:sp>
-        <p:nvSpPr>
-          <p:cNvPr id="15" name="TextBox 14"/>
+              <a:t>About M</a:t>
+            </a:r>
+          </a:p>
+        </p:txBody>
+      </p:sp>
+      <p:sp>
+        <p:nvSpPr>
+          <p:cNvPr id="11" name="TextBox 10"/>
           <p:cNvSpPr txBox="1"/>
           <p:nvPr/>
         </p:nvSpPr>
         <p:spPr>
           <a:xfrm>
-            <a:off x="2834640" y="1965960"/>
-            <a:ext cx="1965960" cy="365760"/>
+            <a:off x="6318504" y="1828800"/>
+            <a:ext cx="5056632" cy="1399032"/>
           </a:xfrm>
           <a:prstGeom prst="rect">
             <a:avLst/>
@@ -7521,118 +7276,38 @@
           </a:bodyPr>
           <a:lstStyle/>
           <a:p>
-            <a:pPr algn="ctr">
+            <a:pPr algn="l">
               <a:spcAft>
                 <a:spcPts val="0"/>
               </a:spcAft>
             </a:pPr>
             <a:r>
-              <a:rPr sz="1400" b="0">
-                <a:solidFill>
-                  <a:srgbClr val="243056"/>
-                </a:solidFill>
-                <a:latin typeface="Yu Mincho"/>
-                <a:ea typeface="Yu Mincho"/>
-              </a:rPr>
-              <a:t>構造化</a:t>
-            </a:r>
-          </a:p>
-        </p:txBody>
-      </p:sp>
-      <p:sp>
-        <p:nvSpPr>
-          <p:cNvPr id="16" name="TextBox 15"/>
-          <p:cNvSpPr txBox="1"/>
-          <p:nvPr/>
-        </p:nvSpPr>
-        <p:spPr>
-          <a:xfrm>
-            <a:off x="2834640" y="2331720"/>
-            <a:ext cx="1965960" cy="777240"/>
-          </a:xfrm>
-          <a:prstGeom prst="rect">
-            <a:avLst/>
-          </a:prstGeom>
-          <a:noFill/>
-        </p:spPr>
-        <p:txBody>
-          <a:bodyPr wrap="square">
-            <a:spAutoFit/>
-          </a:bodyPr>
-          <a:lstStyle/>
-          <a:p>
-            <a:pPr algn="ctr">
-              <a:spcAft>
-                <a:spcPts val="0"/>
-              </a:spcAft>
-            </a:pPr>
-            <a:r>
-              <a:rPr sz="1200" b="0">
+              <a:rPr sz="1300" b="0">
                 <a:solidFill>
                   <a:srgbClr val="6B5E4E"/>
                 </a:solidFill>
                 <a:latin typeface="Yu Gothic"/>
                 <a:ea typeface="Yu Gothic"/>
               </a:rPr>
-              <a:t>呼び出せる項目にする</a:t>
-            </a:r>
-          </a:p>
-        </p:txBody>
-      </p:sp>
-      <p:sp>
-        <p:nvSpPr>
-          <p:cNvPr id="17" name="TextBox 16"/>
-          <p:cNvSpPr txBox="1"/>
-          <p:nvPr/>
-        </p:nvSpPr>
-        <p:spPr>
-          <a:xfrm>
-            <a:off x="4754880" y="2011680"/>
-            <a:ext cx="365760" cy="365760"/>
-          </a:xfrm>
-          <a:prstGeom prst="rect">
-            <a:avLst/>
-          </a:prstGeom>
-          <a:noFill/>
-        </p:spPr>
-        <p:txBody>
-          <a:bodyPr wrap="square">
-            <a:spAutoFit/>
-          </a:bodyPr>
-          <a:lstStyle/>
-          <a:p>
-            <a:pPr algn="ctr">
-              <a:spcAft>
-                <a:spcPts val="0"/>
-              </a:spcAft>
-            </a:pPr>
-            <a:r>
-              <a:rPr sz="1600" b="0">
-                <a:solidFill>
-                  <a:srgbClr val="C4A36A"/>
-                </a:solidFill>
-                <a:latin typeface="Yu Gothic"/>
-                <a:ea typeface="Yu Gothic"/>
-              </a:rPr>
-              <a:t>→</a:t>
-            </a:r>
-          </a:p>
-        </p:txBody>
-      </p:sp>
-      <p:sp>
-        <p:nvSpPr>
-          <p:cNvPr id="18" name="Rounded Rectangle 17"/>
+              <a:t>口コミの量では勝負しない。「誰が、どんな経験と基準で選ぶか」。美味しいだけでなく、その場にちょうどいい。</a:t>
+            </a:r>
+          </a:p>
+        </p:txBody>
+      </p:sp>
+      <p:sp>
+        <p:nvSpPr>
+          <p:cNvPr id="12" name="Rounded Rectangle 11"/>
           <p:cNvSpPr/>
           <p:nvPr/>
         </p:nvSpPr>
         <p:spPr>
           <a:xfrm>
-            <a:off x="5074920" y="1371600"/>
-            <a:ext cx="2148840" cy="1965960"/>
+            <a:off x="640080" y="3520440"/>
+            <a:ext cx="5349240" cy="1965960"/>
           </a:xfrm>
           <a:prstGeom prst="roundRect">
             <a:avLst>
-              <a:gd name="adj" fmla="val 10000"/>
+              <a:gd name="adj" fmla="val 8000"/>
             </a:avLst>
           </a:prstGeom>
           <a:solidFill>
@@ -7668,59 +7343,14 @@
       </p:sp>
       <p:sp>
         <p:nvSpPr>
-          <p:cNvPr id="19" name="Oval 18"/>
-          <p:cNvSpPr/>
-          <p:nvPr/>
-        </p:nvSpPr>
-        <p:spPr>
-          <a:xfrm>
-            <a:off x="5943600" y="1481328"/>
-            <a:ext cx="384048" cy="384048"/>
-          </a:xfrm>
-          <a:prstGeom prst="ellipse">
-            <a:avLst/>
-          </a:prstGeom>
-          <a:solidFill>
-            <a:srgbClr val="FBF8F2"/>
-          </a:solidFill>
-          <a:ln w="12700">
-            <a:solidFill>
-              <a:srgbClr val="C4A36A"/>
-            </a:solidFill>
-          </a:ln>
-        </p:spPr>
-        <p:style>
-          <a:lnRef idx="1">
-            <a:schemeClr val="accent1"/>
-          </a:lnRef>
-          <a:fillRef idx="3">
-            <a:schemeClr val="accent1"/>
-          </a:fillRef>
-          <a:effectRef idx="2">
-            <a:schemeClr val="accent1"/>
-          </a:effectRef>
-          <a:fontRef idx="minor">
-            <a:schemeClr val="lt1"/>
-          </a:fontRef>
-        </p:style>
-        <p:txBody>
-          <a:bodyPr rtlCol="0" anchor="ctr"/>
-          <a:lstStyle/>
-          <a:p>
-            <a:pPr algn="ctr"/>
-          </a:p>
-        </p:txBody>
-      </p:sp>
-      <p:sp>
-        <p:nvSpPr>
-          <p:cNvPr id="20" name="TextBox 19"/>
+          <p:cNvPr id="13" name="TextBox 12"/>
           <p:cNvSpPr txBox="1"/>
           <p:nvPr/>
         </p:nvSpPr>
         <p:spPr>
           <a:xfrm>
-            <a:off x="5943600" y="1517904"/>
-            <a:ext cx="384048" cy="347472"/>
+            <a:off x="786384" y="3648456"/>
+            <a:ext cx="5056632" cy="329184"/>
           </a:xfrm>
           <a:prstGeom prst="rect">
             <a:avLst/>
@@ -7733,34 +7363,34 @@
           </a:bodyPr>
           <a:lstStyle/>
           <a:p>
-            <a:pPr algn="ctr">
+            <a:pPr algn="l">
               <a:spcAft>
                 <a:spcPts val="0"/>
               </a:spcAft>
             </a:pPr>
             <a:r>
-              <a:rPr sz="1100" b="0">
+              <a:rPr sz="1400" b="0">
                 <a:solidFill>
                   <a:srgbClr val="243056"/>
                 </a:solidFill>
-                <a:latin typeface="Yu Gothic"/>
-                <a:ea typeface="Yu Gothic"/>
+                <a:latin typeface="Yu Mincho"/>
+                <a:ea typeface="Yu Mincho"/>
               </a:rPr>
-              <a:t>3</a:t>
-            </a:r>
-          </a:p>
-        </p:txBody>
-      </p:sp>
-      <p:sp>
-        <p:nvSpPr>
-          <p:cNvPr id="21" name="TextBox 20"/>
+              <a:t>入力を非公開へ</a:t>
+            </a:r>
+          </a:p>
+        </p:txBody>
+      </p:sp>
+      <p:sp>
+        <p:nvSpPr>
+          <p:cNvPr id="14" name="TextBox 13"/>
           <p:cNvSpPr txBox="1"/>
           <p:nvPr/>
         </p:nvSpPr>
         <p:spPr>
           <a:xfrm>
-            <a:off x="5166360" y="1965960"/>
-            <a:ext cx="1965960" cy="365760"/>
+            <a:off x="786384" y="3977640"/>
+            <a:ext cx="5056632" cy="1399032"/>
           </a:xfrm>
           <a:prstGeom prst="rect">
             <a:avLst/>
@@ -7773,118 +7403,38 @@
           </a:bodyPr>
           <a:lstStyle/>
           <a:p>
-            <a:pPr algn="ctr">
+            <a:pPr algn="l">
               <a:spcAft>
                 <a:spcPts val="0"/>
               </a:spcAft>
             </a:pPr>
             <a:r>
-              <a:rPr sz="1400" b="0">
-                <a:solidFill>
-                  <a:srgbClr val="243056"/>
-                </a:solidFill>
-                <a:latin typeface="Yu Mincho"/>
-                <a:ea typeface="Yu Mincho"/>
-              </a:rPr>
-              <a:t>登録・更新</a:t>
-            </a:r>
-          </a:p>
-        </p:txBody>
-      </p:sp>
-      <p:sp>
-        <p:nvSpPr>
-          <p:cNvPr id="22" name="TextBox 21"/>
-          <p:cNvSpPr txBox="1"/>
-          <p:nvPr/>
-        </p:nvSpPr>
-        <p:spPr>
-          <a:xfrm>
-            <a:off x="5166360" y="2331720"/>
-            <a:ext cx="1965960" cy="777240"/>
-          </a:xfrm>
-          <a:prstGeom prst="rect">
-            <a:avLst/>
-          </a:prstGeom>
-          <a:noFill/>
-        </p:spPr>
-        <p:txBody>
-          <a:bodyPr wrap="square">
-            <a:spAutoFit/>
-          </a:bodyPr>
-          <a:lstStyle/>
-          <a:p>
-            <a:pPr algn="ctr">
-              <a:spcAft>
-                <a:spcPts val="0"/>
-              </a:spcAft>
-            </a:pPr>
-            <a:r>
-              <a:rPr sz="1200" b="0">
+              <a:rPr sz="1300" b="0">
                 <a:solidFill>
                   <a:srgbClr val="6B5E4E"/>
                 </a:solidFill>
                 <a:latin typeface="Yu Gothic"/>
                 <a:ea typeface="Yu Gothic"/>
               </a:rPr>
-              <a:t>シートが正本。/edit</a:t>
-            </a:r>
-          </a:p>
-        </p:txBody>
-      </p:sp>
-      <p:sp>
-        <p:nvSpPr>
-          <p:cNvPr id="23" name="TextBox 22"/>
-          <p:cNvSpPr txBox="1"/>
-          <p:nvPr/>
-        </p:nvSpPr>
-        <p:spPr>
-          <a:xfrm>
-            <a:off x="7086600" y="2011680"/>
-            <a:ext cx="365760" cy="365760"/>
-          </a:xfrm>
-          <a:prstGeom prst="rect">
-            <a:avLst/>
-          </a:prstGeom>
-          <a:noFill/>
-        </p:spPr>
-        <p:txBody>
-          <a:bodyPr wrap="square">
-            <a:spAutoFit/>
-          </a:bodyPr>
-          <a:lstStyle/>
-          <a:p>
-            <a:pPr algn="ctr">
-              <a:spcAft>
-                <a:spcPts val="0"/>
-              </a:spcAft>
-            </a:pPr>
-            <a:r>
-              <a:rPr sz="1600" b="0">
-                <a:solidFill>
-                  <a:srgbClr val="C4A36A"/>
-                </a:solidFill>
-                <a:latin typeface="Yu Gothic"/>
-                <a:ea typeface="Yu Gothic"/>
-              </a:rPr>
-              <a:t>→</a:t>
-            </a:r>
-          </a:p>
-        </p:txBody>
-      </p:sp>
-      <p:sp>
-        <p:nvSpPr>
-          <p:cNvPr id="24" name="Rounded Rectangle 23"/>
+              <a:t>当初は Google フォーム。いまは非公開の /edit。来客向けから登録・直すを外した。アプリで直しても、シートに残る。</a:t>
+            </a:r>
+          </a:p>
+        </p:txBody>
+      </p:sp>
+      <p:sp>
+        <p:nvSpPr>
+          <p:cNvPr id="15" name="Rounded Rectangle 14"/>
           <p:cNvSpPr/>
           <p:nvPr/>
         </p:nvSpPr>
         <p:spPr>
           <a:xfrm>
-            <a:off x="7406640" y="1371600"/>
-            <a:ext cx="2148840" cy="1965960"/>
+            <a:off x="6172200" y="3520440"/>
+            <a:ext cx="5349240" cy="1965960"/>
           </a:xfrm>
           <a:prstGeom prst="roundRect">
             <a:avLst>
-              <a:gd name="adj" fmla="val 10000"/>
+              <a:gd name="adj" fmla="val 8000"/>
             </a:avLst>
           </a:prstGeom>
           <a:solidFill>
@@ -7920,477 +7470,13 @@
       </p:sp>
       <p:sp>
         <p:nvSpPr>
-          <p:cNvPr id="25" name="Oval 24"/>
-          <p:cNvSpPr/>
-          <p:nvPr/>
-        </p:nvSpPr>
-        <p:spPr>
-          <a:xfrm>
-            <a:off x="8275320" y="1481328"/>
-            <a:ext cx="384048" cy="384048"/>
-          </a:xfrm>
-          <a:prstGeom prst="ellipse">
-            <a:avLst/>
-          </a:prstGeom>
-          <a:solidFill>
-            <a:srgbClr val="FBF8F2"/>
-          </a:solidFill>
-          <a:ln w="12700">
-            <a:solidFill>
-              <a:srgbClr val="C4A36A"/>
-            </a:solidFill>
-          </a:ln>
-        </p:spPr>
-        <p:style>
-          <a:lnRef idx="1">
-            <a:schemeClr val="accent1"/>
-          </a:lnRef>
-          <a:fillRef idx="3">
-            <a:schemeClr val="accent1"/>
-          </a:fillRef>
-          <a:effectRef idx="2">
-            <a:schemeClr val="accent1"/>
-          </a:effectRef>
-          <a:fontRef idx="minor">
-            <a:schemeClr val="lt1"/>
-          </a:fontRef>
-        </p:style>
-        <p:txBody>
-          <a:bodyPr rtlCol="0" anchor="ctr"/>
-          <a:lstStyle/>
-          <a:p>
-            <a:pPr algn="ctr"/>
-          </a:p>
-        </p:txBody>
-      </p:sp>
-      <p:sp>
-        <p:nvSpPr>
-          <p:cNvPr id="26" name="TextBox 25"/>
+          <p:cNvPr id="16" name="TextBox 15"/>
           <p:cNvSpPr txBox="1"/>
           <p:nvPr/>
         </p:nvSpPr>
         <p:spPr>
           <a:xfrm>
-            <a:off x="8275320" y="1517904"/>
-            <a:ext cx="384048" cy="347472"/>
-          </a:xfrm>
-          <a:prstGeom prst="rect">
-            <a:avLst/>
-          </a:prstGeom>
-          <a:noFill/>
-        </p:spPr>
-        <p:txBody>
-          <a:bodyPr wrap="square">
-            <a:spAutoFit/>
-          </a:bodyPr>
-          <a:lstStyle/>
-          <a:p>
-            <a:pPr algn="ctr">
-              <a:spcAft>
-                <a:spcPts val="0"/>
-              </a:spcAft>
-            </a:pPr>
-            <a:r>
-              <a:rPr sz="1100" b="0">
-                <a:solidFill>
-                  <a:srgbClr val="243056"/>
-                </a:solidFill>
-                <a:latin typeface="Yu Gothic"/>
-                <a:ea typeface="Yu Gothic"/>
-              </a:rPr>
-              <a:t>4</a:t>
-            </a:r>
-          </a:p>
-        </p:txBody>
-      </p:sp>
-      <p:sp>
-        <p:nvSpPr>
-          <p:cNvPr id="27" name="TextBox 26"/>
-          <p:cNvSpPr txBox="1"/>
-          <p:nvPr/>
-        </p:nvSpPr>
-        <p:spPr>
-          <a:xfrm>
-            <a:off x="7498080" y="1965960"/>
-            <a:ext cx="1965960" cy="365760"/>
-          </a:xfrm>
-          <a:prstGeom prst="rect">
-            <a:avLst/>
-          </a:prstGeom>
-          <a:noFill/>
-        </p:spPr>
-        <p:txBody>
-          <a:bodyPr wrap="square">
-            <a:spAutoFit/>
-          </a:bodyPr>
-          <a:lstStyle/>
-          <a:p>
-            <a:pPr algn="ctr">
-              <a:spcAft>
-                <a:spcPts val="0"/>
-              </a:spcAft>
-            </a:pPr>
-            <a:r>
-              <a:rPr sz="1400" b="0">
-                <a:solidFill>
-                  <a:srgbClr val="243056"/>
-                </a:solidFill>
-                <a:latin typeface="Yu Mincho"/>
-                <a:ea typeface="Yu Mincho"/>
-              </a:rPr>
-              <a:t>検索</a:t>
-            </a:r>
-          </a:p>
-        </p:txBody>
-      </p:sp>
-      <p:sp>
-        <p:nvSpPr>
-          <p:cNvPr id="28" name="TextBox 27"/>
-          <p:cNvSpPr txBox="1"/>
-          <p:nvPr/>
-        </p:nvSpPr>
-        <p:spPr>
-          <a:xfrm>
-            <a:off x="7498080" y="2331720"/>
-            <a:ext cx="1965960" cy="777240"/>
-          </a:xfrm>
-          <a:prstGeom prst="rect">
-            <a:avLst/>
-          </a:prstGeom>
-          <a:noFill/>
-        </p:spPr>
-        <p:txBody>
-          <a:bodyPr wrap="square">
-            <a:spAutoFit/>
-          </a:bodyPr>
-          <a:lstStyle/>
-          <a:p>
-            <a:pPr algn="ctr">
-              <a:spcAft>
-                <a:spcPts val="0"/>
-              </a:spcAft>
-            </a:pPr>
-            <a:r>
-              <a:rPr sz="1200" b="0">
-                <a:solidFill>
-                  <a:srgbClr val="6B5E4E"/>
-                </a:solidFill>
-                <a:latin typeface="Yu Gothic"/>
-                <a:ea typeface="Yu Gothic"/>
-              </a:rPr>
-              <a:t>条件と単語</a:t>
-            </a:r>
-          </a:p>
-        </p:txBody>
-      </p:sp>
-      <p:sp>
-        <p:nvSpPr>
-          <p:cNvPr id="29" name="TextBox 28"/>
-          <p:cNvSpPr txBox="1"/>
-          <p:nvPr/>
-        </p:nvSpPr>
-        <p:spPr>
-          <a:xfrm>
-            <a:off x="9418320" y="2011680"/>
-            <a:ext cx="365760" cy="365760"/>
-          </a:xfrm>
-          <a:prstGeom prst="rect">
-            <a:avLst/>
-          </a:prstGeom>
-          <a:noFill/>
-        </p:spPr>
-        <p:txBody>
-          <a:bodyPr wrap="square">
-            <a:spAutoFit/>
-          </a:bodyPr>
-          <a:lstStyle/>
-          <a:p>
-            <a:pPr algn="ctr">
-              <a:spcAft>
-                <a:spcPts val="0"/>
-              </a:spcAft>
-            </a:pPr>
-            <a:r>
-              <a:rPr sz="1600" b="0">
-                <a:solidFill>
-                  <a:srgbClr val="C4A36A"/>
-                </a:solidFill>
-                <a:latin typeface="Yu Gothic"/>
-                <a:ea typeface="Yu Gothic"/>
-              </a:rPr>
-              <a:t>→</a:t>
-            </a:r>
-          </a:p>
-        </p:txBody>
-      </p:sp>
-      <p:sp>
-        <p:nvSpPr>
-          <p:cNvPr id="30" name="Rounded Rectangle 29"/>
-          <p:cNvSpPr/>
-          <p:nvPr/>
-        </p:nvSpPr>
-        <p:spPr>
-          <a:xfrm>
-            <a:off x="9738359" y="1371600"/>
-            <a:ext cx="2148840" cy="1965960"/>
-          </a:xfrm>
-          <a:prstGeom prst="roundRect">
-            <a:avLst>
-              <a:gd name="adj" fmla="val 10000"/>
-            </a:avLst>
-          </a:prstGeom>
-          <a:solidFill>
-            <a:srgbClr val="FFFFFF"/>
-          </a:solidFill>
-          <a:ln w="12700">
-            <a:solidFill>
-              <a:srgbClr val="D7CCBA"/>
-            </a:solidFill>
-          </a:ln>
-        </p:spPr>
-        <p:style>
-          <a:lnRef idx="1">
-            <a:schemeClr val="accent1"/>
-          </a:lnRef>
-          <a:fillRef idx="3">
-            <a:schemeClr val="accent1"/>
-          </a:fillRef>
-          <a:effectRef idx="2">
-            <a:schemeClr val="accent1"/>
-          </a:effectRef>
-          <a:fontRef idx="minor">
-            <a:schemeClr val="lt1"/>
-          </a:fontRef>
-        </p:style>
-        <p:txBody>
-          <a:bodyPr rtlCol="0" anchor="ctr"/>
-          <a:lstStyle/>
-          <a:p>
-            <a:pPr algn="ctr"/>
-          </a:p>
-        </p:txBody>
-      </p:sp>
-      <p:sp>
-        <p:nvSpPr>
-          <p:cNvPr id="31" name="Oval 30"/>
-          <p:cNvSpPr/>
-          <p:nvPr/>
-        </p:nvSpPr>
-        <p:spPr>
-          <a:xfrm>
-            <a:off x="10607039" y="1481328"/>
-            <a:ext cx="384048" cy="384048"/>
-          </a:xfrm>
-          <a:prstGeom prst="ellipse">
-            <a:avLst/>
-          </a:prstGeom>
-          <a:solidFill>
-            <a:srgbClr val="FBF8F2"/>
-          </a:solidFill>
-          <a:ln w="12700">
-            <a:solidFill>
-              <a:srgbClr val="C4A36A"/>
-            </a:solidFill>
-          </a:ln>
-        </p:spPr>
-        <p:style>
-          <a:lnRef idx="1">
-            <a:schemeClr val="accent1"/>
-          </a:lnRef>
-          <a:fillRef idx="3">
-            <a:schemeClr val="accent1"/>
-          </a:fillRef>
-          <a:effectRef idx="2">
-            <a:schemeClr val="accent1"/>
-          </a:effectRef>
-          <a:fontRef idx="minor">
-            <a:schemeClr val="lt1"/>
-          </a:fontRef>
-        </p:style>
-        <p:txBody>
-          <a:bodyPr rtlCol="0" anchor="ctr"/>
-          <a:lstStyle/>
-          <a:p>
-            <a:pPr algn="ctr"/>
-          </a:p>
-        </p:txBody>
-      </p:sp>
-      <p:sp>
-        <p:nvSpPr>
-          <p:cNvPr id="32" name="TextBox 31"/>
-          <p:cNvSpPr txBox="1"/>
-          <p:nvPr/>
-        </p:nvSpPr>
-        <p:spPr>
-          <a:xfrm>
-            <a:off x="10607039" y="1517904"/>
-            <a:ext cx="384048" cy="347472"/>
-          </a:xfrm>
-          <a:prstGeom prst="rect">
-            <a:avLst/>
-          </a:prstGeom>
-          <a:noFill/>
-        </p:spPr>
-        <p:txBody>
-          <a:bodyPr wrap="square">
-            <a:spAutoFit/>
-          </a:bodyPr>
-          <a:lstStyle/>
-          <a:p>
-            <a:pPr algn="ctr">
-              <a:spcAft>
-                <a:spcPts val="0"/>
-              </a:spcAft>
-            </a:pPr>
-            <a:r>
-              <a:rPr sz="1100" b="0">
-                <a:solidFill>
-                  <a:srgbClr val="243056"/>
-                </a:solidFill>
-                <a:latin typeface="Yu Gothic"/>
-                <a:ea typeface="Yu Gothic"/>
-              </a:rPr>
-              <a:t>5</a:t>
-            </a:r>
-          </a:p>
-        </p:txBody>
-      </p:sp>
-      <p:sp>
-        <p:nvSpPr>
-          <p:cNvPr id="33" name="TextBox 32"/>
-          <p:cNvSpPr txBox="1"/>
-          <p:nvPr/>
-        </p:nvSpPr>
-        <p:spPr>
-          <a:xfrm>
-            <a:off x="9829799" y="1965960"/>
-            <a:ext cx="1965960" cy="365760"/>
-          </a:xfrm>
-          <a:prstGeom prst="rect">
-            <a:avLst/>
-          </a:prstGeom>
-          <a:noFill/>
-        </p:spPr>
-        <p:txBody>
-          <a:bodyPr wrap="square">
-            <a:spAutoFit/>
-          </a:bodyPr>
-          <a:lstStyle/>
-          <a:p>
-            <a:pPr algn="ctr">
-              <a:spcAft>
-                <a:spcPts val="0"/>
-              </a:spcAft>
-            </a:pPr>
-            <a:r>
-              <a:rPr sz="1400" b="0">
-                <a:solidFill>
-                  <a:srgbClr val="243056"/>
-                </a:solidFill>
-                <a:latin typeface="Yu Mincho"/>
-                <a:ea typeface="Yu Mincho"/>
-              </a:rPr>
-              <a:t>音声</a:t>
-            </a:r>
-          </a:p>
-        </p:txBody>
-      </p:sp>
-      <p:sp>
-        <p:nvSpPr>
-          <p:cNvPr id="34" name="TextBox 33"/>
-          <p:cNvSpPr txBox="1"/>
-          <p:nvPr/>
-        </p:nvSpPr>
-        <p:spPr>
-          <a:xfrm>
-            <a:off x="9829799" y="2331720"/>
-            <a:ext cx="1965960" cy="777240"/>
-          </a:xfrm>
-          <a:prstGeom prst="rect">
-            <a:avLst/>
-          </a:prstGeom>
-          <a:noFill/>
-        </p:spPr>
-        <p:txBody>
-          <a:bodyPr wrap="square">
-            <a:spAutoFit/>
-          </a:bodyPr>
-          <a:lstStyle/>
-          <a:p>
-            <a:pPr algn="ctr">
-              <a:spcAft>
-                <a:spcPts val="0"/>
-              </a:spcAft>
-            </a:pPr>
-            <a:r>
-              <a:rPr sz="1200" b="0">
-                <a:solidFill>
-                  <a:srgbClr val="6B5E4E"/>
-                </a:solidFill>
-                <a:latin typeface="Yu Gothic"/>
-                <a:ea typeface="Yu Gothic"/>
-              </a:rPr>
-              <a:t>入力。AIは未接続</a:t>
-            </a:r>
-          </a:p>
-        </p:txBody>
-      </p:sp>
-      <p:sp>
-        <p:nvSpPr>
-          <p:cNvPr id="35" name="Rounded Rectangle 34"/>
-          <p:cNvSpPr/>
-          <p:nvPr/>
-        </p:nvSpPr>
-        <p:spPr>
-          <a:xfrm>
-            <a:off x="640080" y="3566160"/>
-            <a:ext cx="5349240" cy="1828800"/>
-          </a:xfrm>
-          <a:prstGeom prst="roundRect">
-            <a:avLst>
-              <a:gd name="adj" fmla="val 8000"/>
-            </a:avLst>
-          </a:prstGeom>
-          <a:solidFill>
-            <a:srgbClr val="FFFFFF"/>
-          </a:solidFill>
-          <a:ln w="12700">
-            <a:solidFill>
-              <a:srgbClr val="D7CCBA"/>
-            </a:solidFill>
-          </a:ln>
-        </p:spPr>
-        <p:style>
-          <a:lnRef idx="1">
-            <a:schemeClr val="accent1"/>
-          </a:lnRef>
-          <a:fillRef idx="3">
-            <a:schemeClr val="accent1"/>
-          </a:fillRef>
-          <a:effectRef idx="2">
-            <a:schemeClr val="accent1"/>
-          </a:effectRef>
-          <a:fontRef idx="minor">
-            <a:schemeClr val="lt1"/>
-          </a:fontRef>
-        </p:style>
-        <p:txBody>
-          <a:bodyPr rtlCol="0" anchor="ctr"/>
-          <a:lstStyle/>
-          <a:p>
-            <a:pPr algn="ctr"/>
-          </a:p>
-        </p:txBody>
-      </p:sp>
-      <p:sp>
-        <p:nvSpPr>
-          <p:cNvPr id="36" name="TextBox 35"/>
-          <p:cNvSpPr txBox="1"/>
-          <p:nvPr/>
-        </p:nvSpPr>
-        <p:spPr>
-          <a:xfrm>
-            <a:off x="786384" y="3694176"/>
+            <a:off x="6318504" y="3648456"/>
             <a:ext cx="5056632" cy="329184"/>
           </a:xfrm>
           <a:prstGeom prst="rect">
@@ -8417,21 +7503,21 @@
                 <a:latin typeface="Yu Mincho"/>
                 <a:ea typeface="Yu Mincho"/>
               </a:rPr>
-              <a:t>いま</a:t>
-            </a:r>
-          </a:p>
-        </p:txBody>
-      </p:sp>
-      <p:sp>
-        <p:nvSpPr>
-          <p:cNvPr id="37" name="TextBox 36"/>
+              <a:t>デザインと音声</a:t>
+            </a:r>
+          </a:p>
+        </p:txBody>
+      </p:sp>
+      <p:sp>
+        <p:nvSpPr>
+          <p:cNvPr id="17" name="TextBox 16"/>
           <p:cNvSpPr txBox="1"/>
           <p:nvPr/>
         </p:nvSpPr>
         <p:spPr>
           <a:xfrm>
-            <a:off x="786384" y="4023360"/>
-            <a:ext cx="5056632" cy="1261872"/>
+            <a:off x="6318504" y="3977640"/>
+            <a:ext cx="5056632" cy="1399032"/>
           </a:xfrm>
           <a:prstGeom prst="rect">
             <a:avLst/>
@@ -8457,148 +7543,21 @@
                 <a:latin typeface="Yu Gothic"/>
                 <a:ea typeface="Yu Gothic"/>
               </a:rPr>
-              <a:t>条件・フリーワード・Web Speech の日本語音声。「恵比寿 和食」のような単語・条件はできる。文の意味理解は、まだしない。</a:t>
-            </a:r>
-          </a:p>
-        </p:txBody>
-      </p:sp>
-      <p:sp>
-        <p:nvSpPr>
-          <p:cNvPr id="38" name="Rounded Rectangle 37"/>
-          <p:cNvSpPr/>
-          <p:nvPr/>
-        </p:nvSpPr>
-        <p:spPr>
-          <a:xfrm>
-            <a:off x="6172200" y="3566160"/>
-            <a:ext cx="5349240" cy="1828800"/>
-          </a:xfrm>
-          <a:prstGeom prst="roundRect">
-            <a:avLst>
-              <a:gd name="adj" fmla="val 8000"/>
-            </a:avLst>
-          </a:prstGeom>
-          <a:solidFill>
-            <a:srgbClr val="FFFFFF"/>
-          </a:solidFill>
-          <a:ln w="12700">
-            <a:solidFill>
-              <a:srgbClr val="D7CCBA"/>
-            </a:solidFill>
-          </a:ln>
-        </p:spPr>
-        <p:style>
-          <a:lnRef idx="1">
-            <a:schemeClr val="accent1"/>
-          </a:lnRef>
-          <a:fillRef idx="3">
-            <a:schemeClr val="accent1"/>
-          </a:fillRef>
-          <a:effectRef idx="2">
-            <a:schemeClr val="accent1"/>
-          </a:effectRef>
-          <a:fontRef idx="minor">
-            <a:schemeClr val="lt1"/>
-          </a:fontRef>
-        </p:style>
-        <p:txBody>
-          <a:bodyPr rtlCol="0" anchor="ctr"/>
-          <a:lstStyle/>
-          <a:p>
-            <a:pPr algn="ctr"/>
-          </a:p>
-        </p:txBody>
-      </p:sp>
-      <p:sp>
-        <p:nvSpPr>
-          <p:cNvPr id="39" name="TextBox 38"/>
+              <a:t>見た目は Cursor。かわいい案から上質・知的・ニュートラルへ。いまの音声は入力。「恵比寿 和食」はできる。文の意味理解はこれから。</a:t>
+            </a:r>
+          </a:p>
+        </p:txBody>
+      </p:sp>
+      <p:sp>
+        <p:nvSpPr>
+          <p:cNvPr id="18" name="TextBox 17"/>
           <p:cNvSpPr txBox="1"/>
           <p:nvPr/>
         </p:nvSpPr>
         <p:spPr>
           <a:xfrm>
-            <a:off x="6318504" y="3694176"/>
-            <a:ext cx="5056632" cy="329184"/>
-          </a:xfrm>
-          <a:prstGeom prst="rect">
-            <a:avLst/>
-          </a:prstGeom>
-          <a:noFill/>
-        </p:spPr>
-        <p:txBody>
-          <a:bodyPr wrap="square">
-            <a:spAutoFit/>
-          </a:bodyPr>
-          <a:lstStyle/>
-          <a:p>
-            <a:pPr algn="l">
-              <a:spcAft>
-                <a:spcPts val="0"/>
-              </a:spcAft>
-            </a:pPr>
-            <a:r>
-              <a:rPr sz="1400" b="0">
-                <a:solidFill>
-                  <a:srgbClr val="243056"/>
-                </a:solidFill>
-                <a:latin typeface="Yu Mincho"/>
-                <a:ea typeface="Yu Mincho"/>
-              </a:rPr>
-              <a:t>これから</a:t>
-            </a:r>
-          </a:p>
-        </p:txBody>
-      </p:sp>
-      <p:sp>
-        <p:nvSpPr>
-          <p:cNvPr id="40" name="TextBox 39"/>
-          <p:cNvSpPr txBox="1"/>
-          <p:nvPr/>
-        </p:nvSpPr>
-        <p:spPr>
-          <a:xfrm>
-            <a:off x="6318504" y="4023360"/>
-            <a:ext cx="5056632" cy="1261872"/>
-          </a:xfrm>
-          <a:prstGeom prst="rect">
-            <a:avLst/>
-          </a:prstGeom>
-          <a:noFill/>
-        </p:spPr>
-        <p:txBody>
-          <a:bodyPr wrap="square">
-            <a:spAutoFit/>
-          </a:bodyPr>
-          <a:lstStyle/>
-          <a:p>
-            <a:pPr algn="l">
-              <a:spcAft>
-                <a:spcPts val="0"/>
-              </a:spcAft>
-            </a:pPr>
-            <a:r>
-              <a:rPr sz="1300" b="0">
-                <a:solidFill>
-                  <a:srgbClr val="6B5E4E"/>
-                </a:solidFill>
-                <a:latin typeface="Yu Gothic"/>
-                <a:ea typeface="Yu Gothic"/>
-              </a:rPr>
-              <a:t>「恵比寿で和食が食べたい」をAIが解釈 → 条件へ変換 → M自身の登録データから返す。世の中の店を聞かない。</a:t>
-            </a:r>
-          </a:p>
-        </p:txBody>
-      </p:sp>
-      <p:sp>
-        <p:nvSpPr>
-          <p:cNvPr id="41" name="TextBox 40"/>
-          <p:cNvSpPr txBox="1"/>
-          <p:nvPr/>
-        </p:nvSpPr>
-        <p:spPr>
-          <a:xfrm>
-            <a:off x="731520" y="5532120"/>
-            <a:ext cx="10698480" cy="822960"/>
+            <a:off x="731520" y="5669280"/>
+            <a:ext cx="10698480" cy="640080"/>
           </a:xfrm>
           <a:prstGeom prst="rect">
             <a:avLst/>
@@ -8964,7 +7923,7 @@
                 <a:latin typeface="Yu Gothic"/>
                 <a:ea typeface="Yu Gothic"/>
               </a:rPr>
-              <a:t>今後の計画</a:t>
+              <a:t>コンセプトの続きと、これから</a:t>
             </a:r>
           </a:p>
         </p:txBody>
